--- a/Fall 2026/Week 7 -- Quality Control Jaccard Similarity.pptx
+++ b/Fall 2026/Week 7 -- Quality Control Jaccard Similarity.pptx
@@ -5,7 +5,7 @@
     <p:sldMasterId id="2147483648" r:id="rId1"/>
   </p:sldMasterIdLst>
   <p:notesMasterIdLst>
-    <p:notesMasterId r:id="rId51"/>
+    <p:notesMasterId r:id="rId52"/>
   </p:notesMasterIdLst>
   <p:sldIdLst>
     <p:sldId id="272" r:id="rId2"/>
@@ -26,37 +26,38 @@
     <p:sldId id="561" r:id="rId17"/>
     <p:sldId id="562" r:id="rId18"/>
     <p:sldId id="568" r:id="rId19"/>
-    <p:sldId id="569" r:id="rId20"/>
-    <p:sldId id="563" r:id="rId21"/>
-    <p:sldId id="570" r:id="rId22"/>
-    <p:sldId id="571" r:id="rId23"/>
-    <p:sldId id="564" r:id="rId24"/>
-    <p:sldId id="565" r:id="rId25"/>
-    <p:sldId id="572" r:id="rId26"/>
-    <p:sldId id="566" r:id="rId27"/>
-    <p:sldId id="567" r:id="rId28"/>
-    <p:sldId id="579" r:id="rId29"/>
-    <p:sldId id="580" r:id="rId30"/>
-    <p:sldId id="582" r:id="rId31"/>
-    <p:sldId id="583" r:id="rId32"/>
-    <p:sldId id="581" r:id="rId33"/>
-    <p:sldId id="586" r:id="rId34"/>
-    <p:sldId id="584" r:id="rId35"/>
-    <p:sldId id="585" r:id="rId36"/>
-    <p:sldId id="587" r:id="rId37"/>
-    <p:sldId id="257" r:id="rId38"/>
-    <p:sldId id="805" r:id="rId39"/>
-    <p:sldId id="260" r:id="rId40"/>
-    <p:sldId id="258" r:id="rId41"/>
-    <p:sldId id="399" r:id="rId42"/>
-    <p:sldId id="588" r:id="rId43"/>
-    <p:sldId id="802" r:id="rId44"/>
-    <p:sldId id="270" r:id="rId45"/>
-    <p:sldId id="801" r:id="rId46"/>
-    <p:sldId id="803" r:id="rId47"/>
-    <p:sldId id="557" r:id="rId48"/>
-    <p:sldId id="559" r:id="rId49"/>
-    <p:sldId id="560" r:id="rId50"/>
+    <p:sldId id="809" r:id="rId20"/>
+    <p:sldId id="569" r:id="rId21"/>
+    <p:sldId id="563" r:id="rId22"/>
+    <p:sldId id="570" r:id="rId23"/>
+    <p:sldId id="571" r:id="rId24"/>
+    <p:sldId id="564" r:id="rId25"/>
+    <p:sldId id="565" r:id="rId26"/>
+    <p:sldId id="572" r:id="rId27"/>
+    <p:sldId id="566" r:id="rId28"/>
+    <p:sldId id="567" r:id="rId29"/>
+    <p:sldId id="579" r:id="rId30"/>
+    <p:sldId id="580" r:id="rId31"/>
+    <p:sldId id="582" r:id="rId32"/>
+    <p:sldId id="583" r:id="rId33"/>
+    <p:sldId id="581" r:id="rId34"/>
+    <p:sldId id="586" r:id="rId35"/>
+    <p:sldId id="584" r:id="rId36"/>
+    <p:sldId id="585" r:id="rId37"/>
+    <p:sldId id="587" r:id="rId38"/>
+    <p:sldId id="257" r:id="rId39"/>
+    <p:sldId id="805" r:id="rId40"/>
+    <p:sldId id="260" r:id="rId41"/>
+    <p:sldId id="258" r:id="rId42"/>
+    <p:sldId id="399" r:id="rId43"/>
+    <p:sldId id="588" r:id="rId44"/>
+    <p:sldId id="802" r:id="rId45"/>
+    <p:sldId id="270" r:id="rId46"/>
+    <p:sldId id="801" r:id="rId47"/>
+    <p:sldId id="803" r:id="rId48"/>
+    <p:sldId id="557" r:id="rId49"/>
+    <p:sldId id="559" r:id="rId50"/>
+    <p:sldId id="560" r:id="rId51"/>
   </p:sldIdLst>
   <p:sldSz cx="12192000" cy="6858000"/>
   <p:notesSz cx="6858000" cy="9144000"/>
@@ -187,7 +188,7 @@
   <pc:docChgLst>
     <pc:chgData name="Aleksey Zimin" userId="7f2637d0bc515791" providerId="LiveId" clId="{5F359FD6-B8E9-41DA-90EC-0BA4FD0F3073}"/>
     <pc:docChg chg="undo custSel addSld delSld modSld sldOrd">
-      <pc:chgData name="Aleksey Zimin" userId="7f2637d0bc515791" providerId="LiveId" clId="{5F359FD6-B8E9-41DA-90EC-0BA4FD0F3073}" dt="2026-10-12T17:36:57.270" v="614" actId="20577"/>
+      <pc:chgData name="Aleksey Zimin" userId="7f2637d0bc515791" providerId="LiveId" clId="{5F359FD6-B8E9-41DA-90EC-0BA4FD0F3073}" dt="2026-10-12T17:45:06.805" v="1102" actId="14100"/>
       <pc:docMkLst>
         <pc:docMk/>
       </pc:docMkLst>
@@ -463,6 +464,29 @@
           </ac:spMkLst>
         </pc:spChg>
       </pc:sldChg>
+      <pc:sldChg chg="modSp new mod">
+        <pc:chgData name="Aleksey Zimin" userId="7f2637d0bc515791" providerId="LiveId" clId="{5F359FD6-B8E9-41DA-90EC-0BA4FD0F3073}" dt="2026-10-12T17:45:06.805" v="1102" actId="14100"/>
+        <pc:sldMkLst>
+          <pc:docMk/>
+          <pc:sldMk cId="3946655775" sldId="809"/>
+        </pc:sldMkLst>
+        <pc:spChg chg="mod">
+          <ac:chgData name="Aleksey Zimin" userId="7f2637d0bc515791" providerId="LiveId" clId="{5F359FD6-B8E9-41DA-90EC-0BA4FD0F3073}" dt="2026-10-12T17:40:32.111" v="629" actId="20577"/>
+          <ac:spMkLst>
+            <pc:docMk/>
+            <pc:sldMk cId="3946655775" sldId="809"/>
+            <ac:spMk id="2" creationId="{977562F4-7365-D09F-E958-9CCF6B466144}"/>
+          </ac:spMkLst>
+        </pc:spChg>
+        <pc:spChg chg="mod">
+          <ac:chgData name="Aleksey Zimin" userId="7f2637d0bc515791" providerId="LiveId" clId="{5F359FD6-B8E9-41DA-90EC-0BA4FD0F3073}" dt="2026-10-12T17:45:06.805" v="1102" actId="14100"/>
+          <ac:spMkLst>
+            <pc:docMk/>
+            <pc:sldMk cId="3946655775" sldId="809"/>
+            <ac:spMk id="3" creationId="{72B974B8-17E5-9A3E-C107-7CE21997203D}"/>
+          </ac:spMkLst>
+        </pc:spChg>
+      </pc:sldChg>
     </pc:docChg>
   </pc:docChgLst>
 </pc:chgInfo>
@@ -1112,7 +1136,7 @@
           <a:p>
             <a:fld id="{56C17E1D-5FD8-4E87-B4B9-0D86153B9F38}" type="slidenum">
               <a:rPr lang="en-US" smtClean="0"/>
-              <a:t>37</a:t>
+              <a:t>38</a:t>
             </a:fld>
             <a:endParaRPr lang="en-US"/>
           </a:p>
@@ -8334,6 +8358,616 @@
   <p:cSld>
     <p:spTree>
       <p:nvGrpSpPr>
+        <p:cNvPr id="1" name=""/>
+        <p:cNvGrpSpPr/>
+        <p:nvPr/>
+      </p:nvGrpSpPr>
+      <p:grpSpPr>
+        <a:xfrm>
+          <a:off x="0" y="0"/>
+          <a:ext cx="0" cy="0"/>
+          <a:chOff x="0" y="0"/>
+          <a:chExt cx="0" cy="0"/>
+        </a:xfrm>
+      </p:grpSpPr>
+      <p:sp>
+        <p:nvSpPr>
+          <p:cNvPr id="2" name="Title 1">
+            <a:extLst>
+              <a:ext uri="{FF2B5EF4-FFF2-40B4-BE49-F238E27FC236}">
+                <a16:creationId xmlns:a16="http://schemas.microsoft.com/office/drawing/2014/main" id="{977562F4-7365-D09F-E958-9CCF6B466144}"/>
+              </a:ext>
+            </a:extLst>
+          </p:cNvPr>
+          <p:cNvSpPr>
+            <a:spLocks noGrp="1"/>
+          </p:cNvSpPr>
+          <p:nvPr>
+            <p:ph type="title"/>
+          </p:nvPr>
+        </p:nvSpPr>
+        <p:spPr/>
+        <p:txBody>
+          <a:bodyPr>
+            <a:normAutofit fontScale="90000"/>
+          </a:bodyPr>
+          <a:lstStyle/>
+          <a:p>
+            <a:r>
+              <a:rPr lang="en-US" dirty="0"/>
+              <a:t>Cardinality</a:t>
+            </a:r>
+          </a:p>
+        </p:txBody>
+      </p:sp>
+      <p:sp>
+        <p:nvSpPr>
+          <p:cNvPr id="3" name="Content Placeholder 2">
+            <a:extLst>
+              <a:ext uri="{FF2B5EF4-FFF2-40B4-BE49-F238E27FC236}">
+                <a16:creationId xmlns:a16="http://schemas.microsoft.com/office/drawing/2014/main" id="{72B974B8-17E5-9A3E-C107-7CE21997203D}"/>
+              </a:ext>
+            </a:extLst>
+          </p:cNvPr>
+          <p:cNvSpPr>
+            <a:spLocks noGrp="1"/>
+          </p:cNvSpPr>
+          <p:nvPr>
+            <p:ph idx="1"/>
+          </p:nvPr>
+        </p:nvSpPr>
+        <p:spPr>
+          <a:xfrm>
+            <a:off x="598620" y="1596540"/>
+            <a:ext cx="10972800" cy="4499460"/>
+          </a:xfrm>
+        </p:spPr>
+        <p:txBody>
+          <a:bodyPr/>
+          <a:lstStyle/>
+          <a:p>
+            <a:r>
+              <a:rPr lang="en-US" i="1" dirty="0"/>
+              <a:t>Cardinality</a:t>
+            </a:r>
+            <a:r>
+              <a:rPr lang="en-US" dirty="0"/>
+              <a:t> if a set A = {1,2,3,5} or |A| is the number of </a:t>
+            </a:r>
+            <a:r>
+              <a:rPr lang="en-US" i="1" dirty="0"/>
+              <a:t>distinct</a:t>
+            </a:r>
+            <a:r>
+              <a:rPr lang="en-US" dirty="0"/>
+              <a:t> elements in the set</a:t>
+            </a:r>
+          </a:p>
+          <a:p>
+            <a:r>
+              <a:rPr lang="en-US" dirty="0"/>
+              <a:t>|{1,1,2,3,3}|=3</a:t>
+            </a:r>
+          </a:p>
+          <a:p>
+            <a:r>
+              <a:rPr lang="en-US" dirty="0"/>
+              <a:t>If a set is treated as </a:t>
+            </a:r>
+            <a:r>
+              <a:rPr lang="en-US" i="1" dirty="0"/>
+              <a:t>multiset</a:t>
+            </a:r>
+            <a:r>
+              <a:rPr lang="en-US" dirty="0"/>
+              <a:t>, then cardinality is simply the number of elements:</a:t>
+            </a:r>
+          </a:p>
+          <a:p>
+            <a:pPr lvl="1"/>
+            <a:r>
+              <a:rPr lang="en-US" dirty="0"/>
+              <a:t>For multiset {1,1,2,2,3,3} cardinality is 6</a:t>
+            </a:r>
+          </a:p>
+          <a:p>
+            <a:r>
+              <a:rPr lang="en-US" dirty="0"/>
+              <a:t>We will </a:t>
+            </a:r>
+            <a:r>
+              <a:rPr lang="en-US" u="sng" dirty="0"/>
+              <a:t>not</a:t>
+            </a:r>
+            <a:r>
+              <a:rPr lang="en-US" dirty="0"/>
+              <a:t> be using multisets</a:t>
+            </a:r>
+          </a:p>
+        </p:txBody>
+      </p:sp>
+      <p:sp>
+        <p:nvSpPr>
+          <p:cNvPr id="4" name="Slide Number Placeholder 3">
+            <a:extLst>
+              <a:ext uri="{FF2B5EF4-FFF2-40B4-BE49-F238E27FC236}">
+                <a16:creationId xmlns:a16="http://schemas.microsoft.com/office/drawing/2014/main" id="{4E96AD7F-2204-42B9-FE93-C1A02F426744}"/>
+              </a:ext>
+            </a:extLst>
+          </p:cNvPr>
+          <p:cNvSpPr>
+            <a:spLocks noGrp="1"/>
+          </p:cNvSpPr>
+          <p:nvPr>
+            <p:ph type="sldNum" sz="quarter" idx="12"/>
+          </p:nvPr>
+        </p:nvSpPr>
+        <p:spPr/>
+        <p:txBody>
+          <a:bodyPr/>
+          <a:lstStyle/>
+          <a:p>
+            <a:fld id="{B82CCC60-E8CD-4174-8B1A-7DF615B22EEF}" type="slidenum">
+              <a:rPr lang="en-US" smtClean="0"/>
+              <a:pPr/>
+              <a:t>19</a:t>
+            </a:fld>
+            <a:endParaRPr lang="en-US"/>
+          </a:p>
+        </p:txBody>
+      </p:sp>
+    </p:spTree>
+    <p:extLst>
+      <p:ext uri="{BB962C8B-B14F-4D97-AF65-F5344CB8AC3E}">
+        <p14:creationId xmlns:p14="http://schemas.microsoft.com/office/powerpoint/2010/main" val="3946655775"/>
+      </p:ext>
+    </p:extLst>
+  </p:cSld>
+  <p:clrMapOvr>
+    <a:masterClrMapping/>
+  </p:clrMapOvr>
+</p:sld>
+</file>
+
+<file path=ppt/slides/slide2.xml><?xml version="1.0" encoding="utf-8"?>
+<p:sld xmlns:a="http://schemas.openxmlformats.org/drawingml/2006/main" xmlns:r="http://schemas.openxmlformats.org/officeDocument/2006/relationships" xmlns:p="http://schemas.openxmlformats.org/presentationml/2006/main">
+  <p:cSld>
+    <p:spTree>
+      <p:nvGrpSpPr>
+        <p:cNvPr id="1" name=""/>
+        <p:cNvGrpSpPr/>
+        <p:nvPr/>
+      </p:nvGrpSpPr>
+      <p:grpSpPr>
+        <a:xfrm>
+          <a:off x="0" y="0"/>
+          <a:ext cx="0" cy="0"/>
+          <a:chOff x="0" y="0"/>
+          <a:chExt cx="0" cy="0"/>
+        </a:xfrm>
+      </p:grpSpPr>
+      <p:sp>
+        <p:nvSpPr>
+          <p:cNvPr id="2" name="Title 1">
+            <a:extLst>
+              <a:ext uri="{FF2B5EF4-FFF2-40B4-BE49-F238E27FC236}">
+                <a16:creationId xmlns:a16="http://schemas.microsoft.com/office/drawing/2014/main" id="{736AC582-59F8-8CCD-1823-9771E44A3056}"/>
+              </a:ext>
+            </a:extLst>
+          </p:cNvPr>
+          <p:cNvSpPr>
+            <a:spLocks noGrp="1"/>
+          </p:cNvSpPr>
+          <p:nvPr>
+            <p:ph type="title"/>
+          </p:nvPr>
+        </p:nvSpPr>
+        <p:spPr/>
+        <p:txBody>
+          <a:bodyPr>
+            <a:normAutofit fontScale="90000"/>
+          </a:bodyPr>
+          <a:lstStyle/>
+          <a:p>
+            <a:r>
+              <a:rPr lang="en-US" dirty="0"/>
+              <a:t>Lab #4: Build K-unitigs from K-</a:t>
+            </a:r>
+            <a:r>
+              <a:rPr lang="en-US" dirty="0" err="1"/>
+              <a:t>mers</a:t>
+            </a:r>
+            <a:endParaRPr lang="en-US" dirty="0"/>
+          </a:p>
+        </p:txBody>
+      </p:sp>
+      <p:sp>
+        <p:nvSpPr>
+          <p:cNvPr id="3" name="Content Placeholder 2">
+            <a:extLst>
+              <a:ext uri="{FF2B5EF4-FFF2-40B4-BE49-F238E27FC236}">
+                <a16:creationId xmlns:a16="http://schemas.microsoft.com/office/drawing/2014/main" id="{F22765F7-8C53-F1D8-4FD1-B1279982E17F}"/>
+              </a:ext>
+            </a:extLst>
+          </p:cNvPr>
+          <p:cNvSpPr>
+            <a:spLocks noGrp="1"/>
+          </p:cNvSpPr>
+          <p:nvPr>
+            <p:ph idx="1"/>
+          </p:nvPr>
+        </p:nvSpPr>
+        <p:spPr>
+          <a:xfrm>
+            <a:off x="598620" y="1596540"/>
+            <a:ext cx="10972800" cy="5124936"/>
+          </a:xfrm>
+        </p:spPr>
+        <p:txBody>
+          <a:bodyPr>
+            <a:normAutofit lnSpcReduction="10000"/>
+          </a:bodyPr>
+          <a:lstStyle/>
+          <a:p>
+            <a:r>
+              <a:rPr lang="en-US" sz="1800" dirty="0"/>
+              <a:t>Lab #4: </a:t>
+            </a:r>
+            <a:r>
+              <a:rPr lang="en-US" sz="1800" dirty="0">
+                <a:solidFill>
+                  <a:srgbClr val="FF0000"/>
+                </a:solidFill>
+              </a:rPr>
+              <a:t>Due Friday October 30.</a:t>
+            </a:r>
+            <a:r>
+              <a:rPr lang="en-US" sz="1800" dirty="0"/>
+              <a:t> The goal for Lab #4 is to write code that parses reads in fastq file, counts canonical K-</a:t>
+            </a:r>
+            <a:r>
+              <a:rPr lang="en-US" sz="1800" dirty="0" err="1"/>
+              <a:t>mers</a:t>
+            </a:r>
+            <a:r>
+              <a:rPr lang="en-US" sz="1800" dirty="0"/>
+              <a:t> for a given K, and then builds K-unitigs – unique non branching paths of K-</a:t>
+            </a:r>
+            <a:r>
+              <a:rPr lang="en-US" sz="1800" dirty="0" err="1"/>
+              <a:t>mers</a:t>
+            </a:r>
+            <a:r>
+              <a:rPr lang="en-US" sz="1800" dirty="0"/>
+              <a:t> in a K-mer graph.  K-unitigs are genomic sequences. All K-</a:t>
+            </a:r>
+            <a:r>
+              <a:rPr lang="en-US" sz="1800" dirty="0" err="1"/>
+              <a:t>mers</a:t>
+            </a:r>
+            <a:r>
+              <a:rPr lang="en-US" sz="1800" dirty="0"/>
+              <a:t> in the reads must be present in K-unitigs.  Each K-mer of size K must be in only one K-</a:t>
+            </a:r>
+            <a:r>
+              <a:rPr lang="en-US" sz="1800" dirty="0" err="1"/>
+              <a:t>unitig</a:t>
+            </a:r>
+            <a:r>
+              <a:rPr lang="en-US" sz="1800" dirty="0"/>
+              <a:t>.</a:t>
+            </a:r>
+          </a:p>
+          <a:p>
+            <a:r>
+              <a:rPr lang="en-US" sz="1800" dirty="0"/>
+              <a:t>Reads are provided in </a:t>
+            </a:r>
+            <a:r>
+              <a:rPr lang="en-US" sz="1800" dirty="0" err="1"/>
+              <a:t>autograder</a:t>
+            </a:r>
+            <a:r>
+              <a:rPr lang="en-US" sz="1800" dirty="0"/>
+              <a:t> as “read1.fq”.  You can assume that this file is in your current directory. Reads are also available on github for testing: </a:t>
+            </a:r>
+            <a:r>
+              <a:rPr lang="en-US" sz="1800" dirty="0">
+                <a:hlinkClick r:id="rId2"/>
+              </a:rPr>
+              <a:t>https://github.com/alekseyzimin/BME-Algorithms-for-Analysis-of-Genomic-Data/raw/refs/heads/main/read1.fq</a:t>
+            </a:r>
+            <a:r>
+              <a:rPr lang="en-US" sz="1800" dirty="0"/>
+              <a:t> </a:t>
+            </a:r>
+          </a:p>
+          <a:p>
+            <a:r>
+              <a:rPr lang="en-US" sz="1800" dirty="0"/>
+              <a:t>Write the following functions in python:</a:t>
+            </a:r>
+          </a:p>
+          <a:p>
+            <a:pPr lvl="1"/>
+            <a:r>
+              <a:rPr lang="en-US" sz="1800" dirty="0"/>
+              <a:t>(g:10/u:10) </a:t>
+            </a:r>
+            <a:r>
+              <a:rPr lang="en-US" sz="1800" i="1" dirty="0" err="1"/>
+              <a:t>reverse_complement</a:t>
+            </a:r>
+            <a:r>
+              <a:rPr lang="en-US" sz="1800" i="1" dirty="0"/>
+              <a:t>(seq) </a:t>
+            </a:r>
+            <a:r>
+              <a:rPr lang="en-US" sz="1800" dirty="0"/>
+              <a:t>– returns reverse complement of sequence </a:t>
+            </a:r>
+            <a:r>
+              <a:rPr lang="en-US" sz="1800" i="1" dirty="0"/>
+              <a:t>seq</a:t>
+            </a:r>
+          </a:p>
+          <a:p>
+            <a:pPr lvl="1"/>
+            <a:r>
+              <a:rPr lang="en-US" sz="1800" dirty="0"/>
+              <a:t>(g:10/u:10) </a:t>
+            </a:r>
+            <a:r>
+              <a:rPr lang="en-US" sz="1800" i="1" dirty="0" err="1"/>
+              <a:t>canonical_kmer</a:t>
+            </a:r>
+            <a:r>
+              <a:rPr lang="en-US" sz="1800" i="1" dirty="0"/>
+              <a:t>(</a:t>
+            </a:r>
+            <a:r>
+              <a:rPr lang="en-US" sz="1800" i="1" dirty="0" err="1"/>
+              <a:t>kmer</a:t>
+            </a:r>
+            <a:r>
+              <a:rPr lang="en-US" sz="1800" i="1" dirty="0"/>
+              <a:t>) </a:t>
+            </a:r>
+            <a:r>
+              <a:rPr lang="en-US" sz="1800" dirty="0"/>
+              <a:t>– returns canonical  version of the k-mer </a:t>
+            </a:r>
+            <a:r>
+              <a:rPr lang="en-US" sz="1800" i="1" dirty="0" err="1"/>
+              <a:t>kmer</a:t>
+            </a:r>
+            <a:r>
+              <a:rPr lang="en-US" sz="1800" dirty="0"/>
+              <a:t> using </a:t>
+            </a:r>
+            <a:r>
+              <a:rPr lang="en-US" sz="1800" u="sng" dirty="0"/>
+              <a:t>lexicographic</a:t>
+            </a:r>
+            <a:r>
+              <a:rPr lang="en-US" sz="1800" dirty="0"/>
+              <a:t> order </a:t>
+            </a:r>
+          </a:p>
+          <a:p>
+            <a:pPr lvl="1"/>
+            <a:r>
+              <a:rPr lang="en-US" sz="1800" dirty="0"/>
+              <a:t>(g:10/u:20) </a:t>
+            </a:r>
+            <a:r>
+              <a:rPr lang="en-US" sz="1800" i="1" dirty="0" err="1"/>
+              <a:t>count_canonical_kmers</a:t>
+            </a:r>
+            <a:r>
+              <a:rPr lang="en-US" sz="1800" i="1" dirty="0"/>
+              <a:t>(</a:t>
+            </a:r>
+            <a:r>
+              <a:rPr lang="en-US" sz="1800" i="1" dirty="0" err="1"/>
+              <a:t>file.fastq,k</a:t>
+            </a:r>
+            <a:r>
+              <a:rPr lang="en-US" sz="1800" i="1" dirty="0"/>
+              <a:t>) </a:t>
+            </a:r>
+            <a:r>
+              <a:rPr lang="en-US" sz="1800" dirty="0"/>
+              <a:t>– reads genome sequences from </a:t>
+            </a:r>
+            <a:r>
+              <a:rPr lang="en-US" sz="1800" i="1" dirty="0" err="1"/>
+              <a:t>file.fastq</a:t>
+            </a:r>
+            <a:r>
+              <a:rPr lang="en-US" sz="1800" dirty="0"/>
+              <a:t>, returns dictionary </a:t>
+            </a:r>
+            <a:r>
+              <a:rPr lang="en-US" sz="1800" dirty="0" err="1"/>
+              <a:t>kmer_counts</a:t>
+            </a:r>
+            <a:r>
+              <a:rPr lang="en-US" sz="1800" dirty="0"/>
+              <a:t>[</a:t>
+            </a:r>
+            <a:r>
+              <a:rPr lang="en-US" sz="1800" dirty="0" err="1"/>
+              <a:t>kmer</a:t>
+            </a:r>
+            <a:r>
+              <a:rPr lang="en-US" sz="1800" dirty="0"/>
+              <a:t>]=count for K-mer size </a:t>
+            </a:r>
+            <a:r>
+              <a:rPr lang="en-US" sz="1800" i="1" dirty="0"/>
+              <a:t>k</a:t>
+            </a:r>
+          </a:p>
+          <a:p>
+            <a:pPr lvl="1"/>
+            <a:r>
+              <a:rPr lang="en-US" sz="1800" dirty="0"/>
+              <a:t>(g:10/u:20) </a:t>
+            </a:r>
+            <a:r>
+              <a:rPr lang="en-US" sz="1800" i="1" dirty="0"/>
+              <a:t>compute_n50(sequences) -- </a:t>
+            </a:r>
+            <a:r>
+              <a:rPr lang="en-US" sz="1800" dirty="0"/>
+              <a:t>returns N50 of sequences in the input array </a:t>
+            </a:r>
+            <a:r>
+              <a:rPr lang="en-US" sz="1800" i="1" dirty="0"/>
+              <a:t>sequences</a:t>
+            </a:r>
+            <a:r>
+              <a:rPr lang="en-US" sz="1800" dirty="0"/>
+              <a:t> </a:t>
+            </a:r>
+          </a:p>
+          <a:p>
+            <a:pPr lvl="1"/>
+            <a:r>
+              <a:rPr lang="en-US" sz="1800" dirty="0"/>
+              <a:t>(g:40/u:40) </a:t>
+            </a:r>
+            <a:r>
+              <a:rPr lang="en-US" sz="1800" i="1" dirty="0" err="1"/>
+              <a:t>build_unitigs</a:t>
+            </a:r>
+            <a:r>
+              <a:rPr lang="en-US" sz="1800" i="1" dirty="0"/>
+              <a:t>(</a:t>
+            </a:r>
+            <a:r>
+              <a:rPr lang="en-US" sz="1800" i="1" dirty="0" err="1"/>
+              <a:t>kmer_counts</a:t>
+            </a:r>
+            <a:r>
+              <a:rPr lang="en-US" sz="1800" i="1" dirty="0"/>
+              <a:t>) </a:t>
+            </a:r>
+            <a:r>
+              <a:rPr lang="en-US" sz="1800" dirty="0"/>
+              <a:t>– returns array of k-</a:t>
+            </a:r>
+            <a:r>
+              <a:rPr lang="en-US" sz="1800" dirty="0" err="1"/>
+              <a:t>unitig</a:t>
+            </a:r>
+            <a:r>
+              <a:rPr lang="en-US" sz="1800" dirty="0"/>
+              <a:t> sequences, argument is dictionary </a:t>
+            </a:r>
+            <a:r>
+              <a:rPr lang="en-US" sz="1800" dirty="0" err="1"/>
+              <a:t>kmer_counts</a:t>
+            </a:r>
+            <a:r>
+              <a:rPr lang="en-US" sz="1800" dirty="0"/>
+              <a:t> produced by </a:t>
+            </a:r>
+            <a:r>
+              <a:rPr lang="en-US" sz="1800" i="1" dirty="0" err="1"/>
+              <a:t>count_canonical_kmers</a:t>
+            </a:r>
+            <a:endParaRPr lang="en-US" sz="1800" dirty="0"/>
+          </a:p>
+          <a:p>
+            <a:r>
+              <a:rPr lang="en-US" sz="1800" dirty="0"/>
+              <a:t>Graduate section only(g:20):  run </a:t>
+            </a:r>
+            <a:r>
+              <a:rPr lang="en-US" sz="1800" i="1" dirty="0"/>
+              <a:t>compute_n50(</a:t>
+            </a:r>
+            <a:r>
+              <a:rPr lang="en-US" sz="1800" i="1" dirty="0" err="1"/>
+              <a:t>build_unitigs</a:t>
+            </a:r>
+            <a:r>
+              <a:rPr lang="en-US" sz="1800" i="1" dirty="0"/>
+              <a:t>(</a:t>
+            </a:r>
+            <a:r>
+              <a:rPr lang="en-US" sz="1800" i="1" dirty="0" err="1"/>
+              <a:t>count_canonical_kmers</a:t>
+            </a:r>
+            <a:r>
+              <a:rPr lang="en-US" sz="1800" i="1" dirty="0"/>
+              <a:t>(</a:t>
+            </a:r>
+            <a:r>
+              <a:rPr lang="en-US" sz="1800" i="1" dirty="0" err="1"/>
+              <a:t>fastq_path,k</a:t>
+            </a:r>
+            <a:r>
+              <a:rPr lang="en-US" sz="1800" i="1" dirty="0"/>
+              <a:t>))) </a:t>
+            </a:r>
+            <a:r>
+              <a:rPr lang="en-US" sz="1800" dirty="0"/>
+              <a:t>code varying K-mer size between 15 and 90, and submit a plot of how K-unitigs N50 varies with K.  At which K value the N50(K) is the largest?  Add the value in a text box to the plot.</a:t>
+            </a:r>
+          </a:p>
+        </p:txBody>
+      </p:sp>
+      <p:sp>
+        <p:nvSpPr>
+          <p:cNvPr id="4" name="Slide Number Placeholder 3">
+            <a:extLst>
+              <a:ext uri="{FF2B5EF4-FFF2-40B4-BE49-F238E27FC236}">
+                <a16:creationId xmlns:a16="http://schemas.microsoft.com/office/drawing/2014/main" id="{DEA392B8-A9E4-6BF5-620C-98C3C46365DD}"/>
+              </a:ext>
+            </a:extLst>
+          </p:cNvPr>
+          <p:cNvSpPr>
+            <a:spLocks noGrp="1"/>
+          </p:cNvSpPr>
+          <p:nvPr>
+            <p:ph type="sldNum" sz="quarter" idx="12"/>
+          </p:nvPr>
+        </p:nvSpPr>
+        <p:spPr/>
+        <p:txBody>
+          <a:bodyPr/>
+          <a:lstStyle/>
+          <a:p>
+            <a:fld id="{B82CCC60-E8CD-4174-8B1A-7DF615B22EEF}" type="slidenum">
+              <a:rPr lang="en-US" smtClean="0"/>
+              <a:pPr/>
+              <a:t>2</a:t>
+            </a:fld>
+            <a:endParaRPr lang="en-US"/>
+          </a:p>
+        </p:txBody>
+      </p:sp>
+    </p:spTree>
+    <p:extLst>
+      <p:ext uri="{BB962C8B-B14F-4D97-AF65-F5344CB8AC3E}">
+        <p14:creationId xmlns:p14="http://schemas.microsoft.com/office/powerpoint/2010/main" val="3375321927"/>
+      </p:ext>
+    </p:extLst>
+  </p:cSld>
+  <p:clrMapOvr>
+    <a:masterClrMapping/>
+  </p:clrMapOvr>
+</p:sld>
+</file>
+
+<file path=ppt/slides/slide20.xml><?xml version="1.0" encoding="utf-8"?>
+<p:sld xmlns:a="http://schemas.openxmlformats.org/drawingml/2006/main" xmlns:r="http://schemas.openxmlformats.org/officeDocument/2006/relationships" xmlns:p="http://schemas.openxmlformats.org/presentationml/2006/main">
+  <p:cSld>
+    <p:spTree>
+      <p:nvGrpSpPr>
         <p:cNvPr id="1" name="">
           <a:extLst>
             <a:ext uri="{FF2B5EF4-FFF2-40B4-BE49-F238E27FC236}">
@@ -8406,7 +9040,7 @@
             <a:fld id="{B82CCC60-E8CD-4174-8B1A-7DF615B22EEF}" type="slidenum">
               <a:rPr lang="en-US" smtClean="0"/>
               <a:pPr/>
-              <a:t>19</a:t>
+              <a:t>20</a:t>
             </a:fld>
             <a:endParaRPr lang="en-US"/>
           </a:p>
@@ -8490,7 +9124,7 @@
 </p:sld>
 </file>
 
-<file path=ppt/slides/slide2.xml><?xml version="1.0" encoding="utf-8"?>
+<file path=ppt/slides/slide21.xml><?xml version="1.0" encoding="utf-8"?>
 <p:sld xmlns:a="http://schemas.openxmlformats.org/drawingml/2006/main" xmlns:r="http://schemas.openxmlformats.org/officeDocument/2006/relationships" xmlns:p="http://schemas.openxmlformats.org/presentationml/2006/main">
   <p:cSld>
     <p:spTree>
@@ -8512,7 +9146,7 @@
           <p:cNvPr id="2" name="Title 1">
             <a:extLst>
               <a:ext uri="{FF2B5EF4-FFF2-40B4-BE49-F238E27FC236}">
-                <a16:creationId xmlns:a16="http://schemas.microsoft.com/office/drawing/2014/main" id="{736AC582-59F8-8CCD-1823-9771E44A3056}"/>
+                <a16:creationId xmlns:a16="http://schemas.microsoft.com/office/drawing/2014/main" id="{519C2BBC-94F9-843B-7C5C-7CEBA6147D25}"/>
               </a:ext>
             </a:extLst>
           </p:cNvPr>
@@ -8532,13 +9166,8 @@
           <a:p>
             <a:r>
               <a:rPr lang="en-US" dirty="0"/>
-              <a:t>Lab #4: Build K-unitigs from K-</a:t>
-            </a:r>
-            <a:r>
-              <a:rPr lang="en-US" dirty="0" err="1"/>
-              <a:t>mers</a:t>
-            </a:r>
-            <a:endParaRPr lang="en-US" dirty="0"/>
+              <a:t>Jaccard index (or coefficient)</a:t>
+            </a:r>
           </a:p>
         </p:txBody>
       </p:sp>
@@ -8547,7 +9176,7 @@
           <p:cNvPr id="3" name="Content Placeholder 2">
             <a:extLst>
               <a:ext uri="{FF2B5EF4-FFF2-40B4-BE49-F238E27FC236}">
-                <a16:creationId xmlns:a16="http://schemas.microsoft.com/office/drawing/2014/main" id="{F22765F7-8C53-F1D8-4FD1-B1279982E17F}"/>
+                <a16:creationId xmlns:a16="http://schemas.microsoft.com/office/drawing/2014/main" id="{274ADE7D-2B5E-4CCB-4673-DD4E9EBDE7A8}"/>
               </a:ext>
             </a:extLst>
           </p:cNvPr>
@@ -8561,323 +9190,28 @@
         <p:spPr>
           <a:xfrm>
             <a:off x="598620" y="1596540"/>
-            <a:ext cx="10972800" cy="5124936"/>
+            <a:ext cx="8138980" cy="4173639"/>
           </a:xfrm>
         </p:spPr>
         <p:txBody>
-          <a:bodyPr>
-            <a:normAutofit lnSpcReduction="10000"/>
-          </a:bodyPr>
-          <a:lstStyle/>
-          <a:p>
-            <a:r>
-              <a:rPr lang="en-US" sz="1800" dirty="0"/>
-              <a:t>Lab #4: </a:t>
-            </a:r>
-            <a:r>
-              <a:rPr lang="en-US" sz="1800" dirty="0">
-                <a:solidFill>
-                  <a:srgbClr val="FF0000"/>
-                </a:solidFill>
-              </a:rPr>
-              <a:t>Due Friday October 30.</a:t>
-            </a:r>
-            <a:r>
-              <a:rPr lang="en-US" sz="1800" dirty="0"/>
-              <a:t> The goal for Lab #4 is to write code that parses reads in fastq file, counts canonical K-</a:t>
-            </a:r>
-            <a:r>
-              <a:rPr lang="en-US" sz="1800" dirty="0" err="1"/>
-              <a:t>mers</a:t>
-            </a:r>
-            <a:r>
-              <a:rPr lang="en-US" sz="1800" dirty="0"/>
-              <a:t> for a given K, and then builds K-unitigs – unique non branching paths of K-</a:t>
-            </a:r>
-            <a:r>
-              <a:rPr lang="en-US" sz="1800" dirty="0" err="1"/>
-              <a:t>mers</a:t>
-            </a:r>
-            <a:r>
-              <a:rPr lang="en-US" sz="1800" dirty="0"/>
-              <a:t> in a K-mer graph.  K-unitigs are genomic sequences. All K-</a:t>
-            </a:r>
-            <a:r>
-              <a:rPr lang="en-US" sz="1800" dirty="0" err="1"/>
-              <a:t>mers</a:t>
-            </a:r>
-            <a:r>
-              <a:rPr lang="en-US" sz="1800" dirty="0"/>
-              <a:t> in the reads must be present in K-unitigs.  Each K-mer of size K must be in only one K-</a:t>
-            </a:r>
-            <a:r>
-              <a:rPr lang="en-US" sz="1800" dirty="0" err="1"/>
-              <a:t>unitig</a:t>
-            </a:r>
-            <a:r>
-              <a:rPr lang="en-US" sz="1800" dirty="0"/>
-              <a:t>.</a:t>
-            </a:r>
-          </a:p>
-          <a:p>
-            <a:r>
-              <a:rPr lang="en-US" sz="1800" dirty="0"/>
-              <a:t>Reads are provided in </a:t>
-            </a:r>
-            <a:r>
-              <a:rPr lang="en-US" sz="1800" dirty="0" err="1"/>
-              <a:t>autograder</a:t>
-            </a:r>
-            <a:r>
-              <a:rPr lang="en-US" sz="1800" dirty="0"/>
-              <a:t> as “read1.fq”.  You can assume that this file is in your current directory. Reads are also available on github for testing: </a:t>
-            </a:r>
-            <a:r>
-              <a:rPr lang="en-US" sz="1800" dirty="0">
-                <a:hlinkClick r:id="rId2"/>
-              </a:rPr>
-              <a:t>https://github.com/alekseyzimin/BME-Algorithms-for-Analysis-of-Genomic-Data/raw/refs/heads/main/read1.fq</a:t>
-            </a:r>
-            <a:r>
-              <a:rPr lang="en-US" sz="1800" dirty="0"/>
-              <a:t> </a:t>
-            </a:r>
-          </a:p>
-          <a:p>
-            <a:r>
-              <a:rPr lang="en-US" sz="1800" dirty="0"/>
-              <a:t>Write the following functions in python:</a:t>
-            </a:r>
-          </a:p>
-          <a:p>
-            <a:pPr lvl="1"/>
-            <a:r>
-              <a:rPr lang="en-US" sz="1800" dirty="0"/>
-              <a:t>(g:10/u:10) </a:t>
-            </a:r>
-            <a:r>
-              <a:rPr lang="en-US" sz="1800" i="1" dirty="0" err="1"/>
-              <a:t>reverse_complement</a:t>
-            </a:r>
-            <a:r>
-              <a:rPr lang="en-US" sz="1800" i="1" dirty="0"/>
-              <a:t>(seq) </a:t>
-            </a:r>
-            <a:r>
-              <a:rPr lang="en-US" sz="1800" dirty="0"/>
-              <a:t>– returns reverse complement of sequence </a:t>
-            </a:r>
-            <a:r>
-              <a:rPr lang="en-US" sz="1800" i="1" dirty="0"/>
-              <a:t>seq</a:t>
-            </a:r>
-          </a:p>
-          <a:p>
-            <a:pPr lvl="1"/>
-            <a:r>
-              <a:rPr lang="en-US" sz="1800" dirty="0"/>
-              <a:t>(g:10/u:10) </a:t>
-            </a:r>
-            <a:r>
-              <a:rPr lang="en-US" sz="1800" i="1" dirty="0" err="1"/>
-              <a:t>canonical_kmer</a:t>
-            </a:r>
-            <a:r>
-              <a:rPr lang="en-US" sz="1800" i="1" dirty="0"/>
-              <a:t>(</a:t>
-            </a:r>
-            <a:r>
-              <a:rPr lang="en-US" sz="1800" i="1" dirty="0" err="1"/>
-              <a:t>kmer</a:t>
-            </a:r>
-            <a:r>
-              <a:rPr lang="en-US" sz="1800" i="1" dirty="0"/>
-              <a:t>) </a:t>
-            </a:r>
-            <a:r>
-              <a:rPr lang="en-US" sz="1800" dirty="0"/>
-              <a:t>– returns canonical  version of the k-mer </a:t>
-            </a:r>
-            <a:r>
-              <a:rPr lang="en-US" sz="1800" i="1" dirty="0" err="1"/>
-              <a:t>kmer</a:t>
-            </a:r>
-            <a:r>
-              <a:rPr lang="en-US" sz="1800" dirty="0"/>
-              <a:t> using </a:t>
-            </a:r>
-            <a:r>
-              <a:rPr lang="en-US" sz="1800" u="sng" dirty="0"/>
-              <a:t>lexicographic</a:t>
-            </a:r>
-            <a:r>
-              <a:rPr lang="en-US" sz="1800" dirty="0"/>
-              <a:t> order </a:t>
-            </a:r>
-          </a:p>
-          <a:p>
-            <a:pPr lvl="1"/>
-            <a:r>
-              <a:rPr lang="en-US" sz="1800" dirty="0"/>
-              <a:t>(g:10/u:20) </a:t>
-            </a:r>
-            <a:r>
-              <a:rPr lang="en-US" sz="1800" i="1" dirty="0" err="1"/>
-              <a:t>count_canonical_kmers</a:t>
-            </a:r>
-            <a:r>
-              <a:rPr lang="en-US" sz="1800" i="1" dirty="0"/>
-              <a:t>(</a:t>
-            </a:r>
-            <a:r>
-              <a:rPr lang="en-US" sz="1800" i="1" dirty="0" err="1"/>
-              <a:t>file.fastq,k</a:t>
-            </a:r>
-            <a:r>
-              <a:rPr lang="en-US" sz="1800" i="1" dirty="0"/>
-              <a:t>) </a:t>
-            </a:r>
-            <a:r>
-              <a:rPr lang="en-US" sz="1800" dirty="0"/>
-              <a:t>– reads genome sequences from </a:t>
-            </a:r>
-            <a:r>
-              <a:rPr lang="en-US" sz="1800" i="1" dirty="0" err="1"/>
-              <a:t>file.fastq</a:t>
-            </a:r>
-            <a:r>
-              <a:rPr lang="en-US" sz="1800" dirty="0"/>
-              <a:t>, returns dictionary </a:t>
-            </a:r>
-            <a:r>
-              <a:rPr lang="en-US" sz="1800" dirty="0" err="1"/>
-              <a:t>kmer_counts</a:t>
-            </a:r>
-            <a:r>
-              <a:rPr lang="en-US" sz="1800" dirty="0"/>
-              <a:t>[</a:t>
-            </a:r>
-            <a:r>
-              <a:rPr lang="en-US" sz="1800" dirty="0" err="1"/>
-              <a:t>kmer</a:t>
-            </a:r>
-            <a:r>
-              <a:rPr lang="en-US" sz="1800" dirty="0"/>
-              <a:t>]=count for K-mer size </a:t>
-            </a:r>
-            <a:r>
-              <a:rPr lang="en-US" sz="1800" i="1" dirty="0"/>
-              <a:t>k</a:t>
-            </a:r>
-          </a:p>
-          <a:p>
-            <a:pPr lvl="1"/>
-            <a:r>
-              <a:rPr lang="en-US" sz="1800" dirty="0"/>
-              <a:t>(g:10/u:20) </a:t>
-            </a:r>
-            <a:r>
-              <a:rPr lang="en-US" sz="1800" i="1" dirty="0"/>
-              <a:t>compute_n50(sequences) -- </a:t>
-            </a:r>
-            <a:r>
-              <a:rPr lang="en-US" sz="1800" dirty="0"/>
-              <a:t>returns N50 of sequences in the input array </a:t>
-            </a:r>
-            <a:r>
-              <a:rPr lang="en-US" sz="1800" i="1" dirty="0"/>
-              <a:t>sequences</a:t>
-            </a:r>
-            <a:r>
-              <a:rPr lang="en-US" sz="1800" dirty="0"/>
-              <a:t> </a:t>
-            </a:r>
-          </a:p>
-          <a:p>
-            <a:pPr lvl="1"/>
-            <a:r>
-              <a:rPr lang="en-US" sz="1800" dirty="0"/>
-              <a:t>(g:40/u:40) </a:t>
-            </a:r>
-            <a:r>
-              <a:rPr lang="en-US" sz="1800" i="1" dirty="0" err="1"/>
-              <a:t>build_unitigs</a:t>
-            </a:r>
-            <a:r>
-              <a:rPr lang="en-US" sz="1800" i="1" dirty="0"/>
-              <a:t>(</a:t>
-            </a:r>
-            <a:r>
-              <a:rPr lang="en-US" sz="1800" i="1" dirty="0" err="1"/>
-              <a:t>kmer_counts</a:t>
-            </a:r>
-            <a:r>
-              <a:rPr lang="en-US" sz="1800" i="1" dirty="0"/>
-              <a:t>) </a:t>
-            </a:r>
-            <a:r>
-              <a:rPr lang="en-US" sz="1800" dirty="0"/>
-              <a:t>– returns array of k-</a:t>
-            </a:r>
-            <a:r>
-              <a:rPr lang="en-US" sz="1800" dirty="0" err="1"/>
-              <a:t>unitig</a:t>
-            </a:r>
-            <a:r>
-              <a:rPr lang="en-US" sz="1800" dirty="0"/>
-              <a:t> sequences, argument is dictionary </a:t>
-            </a:r>
-            <a:r>
-              <a:rPr lang="en-US" sz="1800" dirty="0" err="1"/>
-              <a:t>kmer_counts</a:t>
-            </a:r>
-            <a:r>
-              <a:rPr lang="en-US" sz="1800" dirty="0"/>
-              <a:t> produced by </a:t>
-            </a:r>
-            <a:r>
-              <a:rPr lang="en-US" sz="1800" i="1" dirty="0" err="1"/>
-              <a:t>count_canonical_kmers</a:t>
-            </a:r>
-            <a:endParaRPr lang="en-US" sz="1800" dirty="0"/>
-          </a:p>
-          <a:p>
-            <a:r>
-              <a:rPr lang="en-US" sz="1800" dirty="0"/>
-              <a:t>Graduate section only(g:20):  run </a:t>
-            </a:r>
-            <a:r>
-              <a:rPr lang="en-US" sz="1800" i="1" dirty="0"/>
-              <a:t>compute_n50(</a:t>
-            </a:r>
-            <a:r>
-              <a:rPr lang="en-US" sz="1800" i="1" dirty="0" err="1"/>
-              <a:t>build_unitigs</a:t>
-            </a:r>
-            <a:r>
-              <a:rPr lang="en-US" sz="1800" i="1" dirty="0"/>
-              <a:t>(</a:t>
-            </a:r>
-            <a:r>
-              <a:rPr lang="en-US" sz="1800" i="1" dirty="0" err="1"/>
-              <a:t>count_canonical_kmers</a:t>
-            </a:r>
-            <a:r>
-              <a:rPr lang="en-US" sz="1800" i="1" dirty="0"/>
-              <a:t>(</a:t>
-            </a:r>
-            <a:r>
-              <a:rPr lang="en-US" sz="1800" i="1" dirty="0" err="1"/>
-              <a:t>fastq_path,k</a:t>
-            </a:r>
-            <a:r>
-              <a:rPr lang="en-US" sz="1800" i="1" dirty="0"/>
-              <a:t>))) </a:t>
-            </a:r>
-            <a:r>
-              <a:rPr lang="en-US" sz="1800" dirty="0"/>
-              <a:t>code varying K-mer size between 15 and 90, and submit a plot of how K-unitigs N50 varies with K.  At which K value the N50(K) is the largest?  Add the value in a text box to the plot.</a:t>
-            </a:r>
+          <a:bodyPr/>
+          <a:lstStyle/>
+          <a:p>
+            <a:r>
+              <a:rPr lang="en-US" dirty="0"/>
+              <a:t>The Jaccard index is a statistic used for gauging the similarity and diversity of sample sets. It is defined as the intersection size divided by the union size, also called intersection over union (</a:t>
+            </a:r>
+            <a:r>
+              <a:rPr lang="en-US" dirty="0" err="1"/>
+              <a:t>IoU</a:t>
+            </a:r>
+            <a:r>
+              <a:rPr lang="en-US" dirty="0"/>
+              <a:t>):</a:t>
+            </a:r>
+          </a:p>
+          <a:p>
+            <a:endParaRPr lang="en-US" dirty="0"/>
           </a:p>
         </p:txBody>
       </p:sp>
@@ -8886,7 +9220,7 @@
           <p:cNvPr id="4" name="Slide Number Placeholder 3">
             <a:extLst>
               <a:ext uri="{FF2B5EF4-FFF2-40B4-BE49-F238E27FC236}">
-                <a16:creationId xmlns:a16="http://schemas.microsoft.com/office/drawing/2014/main" id="{DEA392B8-A9E4-6BF5-620C-98C3C46365DD}"/>
+                <a16:creationId xmlns:a16="http://schemas.microsoft.com/office/drawing/2014/main" id="{6DE9B8E9-594C-0488-6F6D-528D70D58C0F}"/>
               </a:ext>
             </a:extLst>
           </p:cNvPr>
@@ -8905,141 +9239,7 @@
             <a:fld id="{B82CCC60-E8CD-4174-8B1A-7DF615B22EEF}" type="slidenum">
               <a:rPr lang="en-US" smtClean="0"/>
               <a:pPr/>
-              <a:t>2</a:t>
-            </a:fld>
-            <a:endParaRPr lang="en-US"/>
-          </a:p>
-        </p:txBody>
-      </p:sp>
-    </p:spTree>
-    <p:extLst>
-      <p:ext uri="{BB962C8B-B14F-4D97-AF65-F5344CB8AC3E}">
-        <p14:creationId xmlns:p14="http://schemas.microsoft.com/office/powerpoint/2010/main" val="3375321927"/>
-      </p:ext>
-    </p:extLst>
-  </p:cSld>
-  <p:clrMapOvr>
-    <a:masterClrMapping/>
-  </p:clrMapOvr>
-</p:sld>
-</file>
-
-<file path=ppt/slides/slide20.xml><?xml version="1.0" encoding="utf-8"?>
-<p:sld xmlns:a="http://schemas.openxmlformats.org/drawingml/2006/main" xmlns:r="http://schemas.openxmlformats.org/officeDocument/2006/relationships" xmlns:p="http://schemas.openxmlformats.org/presentationml/2006/main">
-  <p:cSld>
-    <p:spTree>
-      <p:nvGrpSpPr>
-        <p:cNvPr id="1" name=""/>
-        <p:cNvGrpSpPr/>
-        <p:nvPr/>
-      </p:nvGrpSpPr>
-      <p:grpSpPr>
-        <a:xfrm>
-          <a:off x="0" y="0"/>
-          <a:ext cx="0" cy="0"/>
-          <a:chOff x="0" y="0"/>
-          <a:chExt cx="0" cy="0"/>
-        </a:xfrm>
-      </p:grpSpPr>
-      <p:sp>
-        <p:nvSpPr>
-          <p:cNvPr id="2" name="Title 1">
-            <a:extLst>
-              <a:ext uri="{FF2B5EF4-FFF2-40B4-BE49-F238E27FC236}">
-                <a16:creationId xmlns:a16="http://schemas.microsoft.com/office/drawing/2014/main" id="{519C2BBC-94F9-843B-7C5C-7CEBA6147D25}"/>
-              </a:ext>
-            </a:extLst>
-          </p:cNvPr>
-          <p:cNvSpPr>
-            <a:spLocks noGrp="1"/>
-          </p:cNvSpPr>
-          <p:nvPr>
-            <p:ph type="title"/>
-          </p:nvPr>
-        </p:nvSpPr>
-        <p:spPr/>
-        <p:txBody>
-          <a:bodyPr>
-            <a:normAutofit fontScale="90000"/>
-          </a:bodyPr>
-          <a:lstStyle/>
-          <a:p>
-            <a:r>
-              <a:rPr lang="en-US" dirty="0"/>
-              <a:t>Jaccard index (or coefficient)</a:t>
-            </a:r>
-          </a:p>
-        </p:txBody>
-      </p:sp>
-      <p:sp>
-        <p:nvSpPr>
-          <p:cNvPr id="3" name="Content Placeholder 2">
-            <a:extLst>
-              <a:ext uri="{FF2B5EF4-FFF2-40B4-BE49-F238E27FC236}">
-                <a16:creationId xmlns:a16="http://schemas.microsoft.com/office/drawing/2014/main" id="{274ADE7D-2B5E-4CCB-4673-DD4E9EBDE7A8}"/>
-              </a:ext>
-            </a:extLst>
-          </p:cNvPr>
-          <p:cNvSpPr>
-            <a:spLocks noGrp="1"/>
-          </p:cNvSpPr>
-          <p:nvPr>
-            <p:ph idx="1"/>
-          </p:nvPr>
-        </p:nvSpPr>
-        <p:spPr>
-          <a:xfrm>
-            <a:off x="598620" y="1596540"/>
-            <a:ext cx="8138980" cy="4173639"/>
-          </a:xfrm>
-        </p:spPr>
-        <p:txBody>
-          <a:bodyPr/>
-          <a:lstStyle/>
-          <a:p>
-            <a:r>
-              <a:rPr lang="en-US" dirty="0"/>
-              <a:t>The Jaccard index is a statistic used for gauging the similarity and diversity of sample sets. It is defined as the intersection size divided by the union size, also called intersection over union (</a:t>
-            </a:r>
-            <a:r>
-              <a:rPr lang="en-US" dirty="0" err="1"/>
-              <a:t>IoU</a:t>
-            </a:r>
-            <a:r>
-              <a:rPr lang="en-US" dirty="0"/>
-              <a:t>):</a:t>
-            </a:r>
-          </a:p>
-          <a:p>
-            <a:endParaRPr lang="en-US" dirty="0"/>
-          </a:p>
-        </p:txBody>
-      </p:sp>
-      <p:sp>
-        <p:nvSpPr>
-          <p:cNvPr id="4" name="Slide Number Placeholder 3">
-            <a:extLst>
-              <a:ext uri="{FF2B5EF4-FFF2-40B4-BE49-F238E27FC236}">
-                <a16:creationId xmlns:a16="http://schemas.microsoft.com/office/drawing/2014/main" id="{6DE9B8E9-594C-0488-6F6D-528D70D58C0F}"/>
-              </a:ext>
-            </a:extLst>
-          </p:cNvPr>
-          <p:cNvSpPr>
-            <a:spLocks noGrp="1"/>
-          </p:cNvSpPr>
-          <p:nvPr>
-            <p:ph type="sldNum" sz="quarter" idx="12"/>
-          </p:nvPr>
-        </p:nvSpPr>
-        <p:spPr/>
-        <p:txBody>
-          <a:bodyPr/>
-          <a:lstStyle/>
-          <a:p>
-            <a:fld id="{B82CCC60-E8CD-4174-8B1A-7DF615B22EEF}" type="slidenum">
-              <a:rPr lang="en-US" smtClean="0"/>
-              <a:pPr/>
-              <a:t>20</a:t>
+              <a:t>21</a:t>
             </a:fld>
             <a:endParaRPr lang="en-US"/>
           </a:p>
@@ -9431,7 +9631,7 @@
 </p:sld>
 </file>
 
-<file path=ppt/slides/slide21.xml><?xml version="1.0" encoding="utf-8"?>
+<file path=ppt/slides/slide22.xml><?xml version="1.0" encoding="utf-8"?>
 <p:sld xmlns:a="http://schemas.openxmlformats.org/drawingml/2006/main" xmlns:r="http://schemas.openxmlformats.org/officeDocument/2006/relationships" xmlns:p="http://schemas.openxmlformats.org/presentationml/2006/main">
   <p:cSld>
     <p:spTree>
@@ -9508,7 +9708,7 @@
             <a:fld id="{B82CCC60-E8CD-4174-8B1A-7DF615B22EEF}" type="slidenum">
               <a:rPr lang="en-US" smtClean="0"/>
               <a:pPr/>
-              <a:t>21</a:t>
+              <a:t>22</a:t>
             </a:fld>
             <a:endParaRPr lang="en-US"/>
           </a:p>
@@ -9667,7 +9867,7 @@
 </p:sld>
 </file>
 
-<file path=ppt/slides/slide22.xml><?xml version="1.0" encoding="utf-8"?>
+<file path=ppt/slides/slide23.xml><?xml version="1.0" encoding="utf-8"?>
 <p:sld xmlns:a="http://schemas.openxmlformats.org/drawingml/2006/main" xmlns:r="http://schemas.openxmlformats.org/officeDocument/2006/relationships" xmlns:p="http://schemas.openxmlformats.org/presentationml/2006/main">
   <p:cSld>
     <p:spTree>
@@ -9744,7 +9944,7 @@
             <a:fld id="{B82CCC60-E8CD-4174-8B1A-7DF615B22EEF}" type="slidenum">
               <a:rPr lang="en-US" smtClean="0"/>
               <a:pPr/>
-              <a:t>22</a:t>
+              <a:t>23</a:t>
             </a:fld>
             <a:endParaRPr lang="en-US"/>
           </a:p>
@@ -9828,7 +10028,7 @@
 </p:sld>
 </file>
 
-<file path=ppt/slides/slide23.xml><?xml version="1.0" encoding="utf-8"?>
+<file path=ppt/slides/slide24.xml><?xml version="1.0" encoding="utf-8"?>
 <p:sld xmlns:a="http://schemas.openxmlformats.org/drawingml/2006/main" xmlns:r="http://schemas.openxmlformats.org/officeDocument/2006/relationships" xmlns:p="http://schemas.openxmlformats.org/presentationml/2006/main">
   <p:cSld>
     <p:spTree>
@@ -10004,7 +10204,7 @@
             <a:fld id="{B82CCC60-E8CD-4174-8B1A-7DF615B22EEF}" type="slidenum">
               <a:rPr lang="en-US" smtClean="0"/>
               <a:pPr/>
-              <a:t>23</a:t>
+              <a:t>24</a:t>
             </a:fld>
             <a:endParaRPr lang="en-US"/>
           </a:p>
@@ -10581,7 +10781,7 @@
 </p:sld>
 </file>
 
-<file path=ppt/slides/slide24.xml><?xml version="1.0" encoding="utf-8"?>
+<file path=ppt/slides/slide25.xml><?xml version="1.0" encoding="utf-8"?>
 <p:sld xmlns:a="http://schemas.openxmlformats.org/drawingml/2006/main" xmlns:r="http://schemas.openxmlformats.org/officeDocument/2006/relationships" xmlns:p="http://schemas.openxmlformats.org/presentationml/2006/main">
   <p:cSld>
     <p:spTree>
@@ -10869,7 +11069,7 @@
             <a:fld id="{B82CCC60-E8CD-4174-8B1A-7DF615B22EEF}" type="slidenum">
               <a:rPr lang="en-US" smtClean="0"/>
               <a:pPr/>
-              <a:t>24</a:t>
+              <a:t>25</a:t>
             </a:fld>
             <a:endParaRPr lang="en-US"/>
           </a:p>
@@ -11510,7 +11710,7 @@
 </p:sld>
 </file>
 
-<file path=ppt/slides/slide25.xml><?xml version="1.0" encoding="utf-8"?>
+<file path=ppt/slides/slide26.xml><?xml version="1.0" encoding="utf-8"?>
 <p:sld xmlns:a="http://schemas.openxmlformats.org/drawingml/2006/main" xmlns:r="http://schemas.openxmlformats.org/officeDocument/2006/relationships" xmlns:p="http://schemas.openxmlformats.org/presentationml/2006/main">
   <p:cSld>
     <p:spTree>
@@ -11581,7 +11781,7 @@
             <a:fld id="{B82CCC60-E8CD-4174-8B1A-7DF615B22EEF}" type="slidenum">
               <a:rPr lang="en-US" smtClean="0"/>
               <a:pPr/>
-              <a:t>25</a:t>
+              <a:t>26</a:t>
             </a:fld>
             <a:endParaRPr lang="en-US"/>
           </a:p>
@@ -12355,7 +12555,7 @@
 </p:sld>
 </file>
 
-<file path=ppt/slides/slide26.xml><?xml version="1.0" encoding="utf-8"?>
+<file path=ppt/slides/slide27.xml><?xml version="1.0" encoding="utf-8"?>
 <p:sld xmlns:a="http://schemas.openxmlformats.org/drawingml/2006/main" xmlns:r="http://schemas.openxmlformats.org/officeDocument/2006/relationships" xmlns:p="http://schemas.openxmlformats.org/presentationml/2006/main">
   <p:cSld>
     <p:spTree>
@@ -12436,7 +12636,7 @@
             <a:fld id="{B82CCC60-E8CD-4174-8B1A-7DF615B22EEF}" type="slidenum">
               <a:rPr lang="en-US" smtClean="0"/>
               <a:pPr/>
-              <a:t>26</a:t>
+              <a:t>27</a:t>
             </a:fld>
             <a:endParaRPr lang="en-US"/>
           </a:p>
@@ -12936,7 +13136,7 @@
 </p:sld>
 </file>
 
-<file path=ppt/slides/slide27.xml><?xml version="1.0" encoding="utf-8"?>
+<file path=ppt/slides/slide28.xml><?xml version="1.0" encoding="utf-8"?>
 <p:sld xmlns:a="http://schemas.openxmlformats.org/drawingml/2006/main" xmlns:r="http://schemas.openxmlformats.org/officeDocument/2006/relationships" xmlns:p="http://schemas.openxmlformats.org/presentationml/2006/main">
   <p:cSld>
     <p:spTree>
@@ -13108,7 +13308,7 @@
             <a:fld id="{B82CCC60-E8CD-4174-8B1A-7DF615B22EEF}" type="slidenum">
               <a:rPr lang="en-US" smtClean="0"/>
               <a:pPr/>
-              <a:t>27</a:t>
+              <a:t>28</a:t>
             </a:fld>
             <a:endParaRPr lang="en-US"/>
           </a:p>
@@ -13418,7 +13618,7 @@
 </p:sld>
 </file>
 
-<file path=ppt/slides/slide28.xml><?xml version="1.0" encoding="utf-8"?>
+<file path=ppt/slides/slide29.xml><?xml version="1.0" encoding="utf-8"?>
 <p:sld xmlns:a="http://schemas.openxmlformats.org/drawingml/2006/main" xmlns:r="http://schemas.openxmlformats.org/officeDocument/2006/relationships" xmlns:p="http://schemas.openxmlformats.org/presentationml/2006/main">
   <p:cSld>
     <p:spTree>
@@ -13521,7 +13721,7 @@
             <a:fld id="{B82CCC60-E8CD-4174-8B1A-7DF615B22EEF}" type="slidenum">
               <a:rPr lang="en-US" smtClean="0"/>
               <a:pPr/>
-              <a:t>28</a:t>
+              <a:t>29</a:t>
             </a:fld>
             <a:endParaRPr lang="en-US"/>
           </a:p>
@@ -13765,7 +13965,7 @@
 </p:sld>
 </file>
 
-<file path=ppt/slides/slide29.xml><?xml version="1.0" encoding="utf-8"?>
+<file path=ppt/slides/slide3.xml><?xml version="1.0" encoding="utf-8"?>
 <p:sld xmlns:a="http://schemas.openxmlformats.org/drawingml/2006/main" xmlns:r="http://schemas.openxmlformats.org/officeDocument/2006/relationships" xmlns:p="http://schemas.openxmlformats.org/presentationml/2006/main">
   <p:cSld>
     <p:spTree>
@@ -13787,7 +13987,7 @@
           <p:cNvPr id="2" name="Title 1">
             <a:extLst>
               <a:ext uri="{FF2B5EF4-FFF2-40B4-BE49-F238E27FC236}">
-                <a16:creationId xmlns:a16="http://schemas.microsoft.com/office/drawing/2014/main" id="{E1992CFA-9895-FE23-736B-0ADCCDC9F354}"/>
+                <a16:creationId xmlns:a16="http://schemas.microsoft.com/office/drawing/2014/main" id="{5FB40EF0-5913-D081-346D-D16D63755BA2}"/>
               </a:ext>
             </a:extLst>
           </p:cNvPr>
@@ -13807,7 +14007,7 @@
           <a:p>
             <a:r>
               <a:rPr lang="en-US" dirty="0"/>
-              <a:t>Characteristics of metagenomic data</a:t>
+              <a:t>K-unitigs</a:t>
             </a:r>
           </a:p>
         </p:txBody>
@@ -13817,7 +14017,7 @@
           <p:cNvPr id="3" name="Content Placeholder 2">
             <a:extLst>
               <a:ext uri="{FF2B5EF4-FFF2-40B4-BE49-F238E27FC236}">
-                <a16:creationId xmlns:a16="http://schemas.microsoft.com/office/drawing/2014/main" id="{B4F0B9E3-A9AD-BAD1-0027-F0D5944E8293}"/>
+                <a16:creationId xmlns:a16="http://schemas.microsoft.com/office/drawing/2014/main" id="{C7F3DDAB-4893-CF5C-98EF-F172D1CF7467}"/>
               </a:ext>
             </a:extLst>
           </p:cNvPr>
@@ -13835,36 +14035,51 @@
           <a:p>
             <a:r>
               <a:rPr lang="en-US" dirty="0"/>
-              <a:t>Typically short reads (Illumina)</a:t>
-            </a:r>
-          </a:p>
-          <a:p>
-            <a:r>
-              <a:rPr lang="en-US" dirty="0"/>
-              <a:t>Number of species: unknown</a:t>
-            </a:r>
-          </a:p>
-          <a:p>
-            <a:r>
-              <a:rPr lang="en-US" dirty="0"/>
-              <a:t>Coverage of each species: unknown</a:t>
-            </a:r>
-          </a:p>
-          <a:p>
-            <a:r>
-              <a:rPr lang="en-US" dirty="0"/>
-              <a:t>Assembly possible? Maybe, but similar species can assemble together forming chimeric contigs</a:t>
-            </a:r>
-          </a:p>
-          <a:p>
-            <a:r>
-              <a:rPr lang="en-US" dirty="0"/>
-              <a:t>Preferred mode of analysis: K-</a:t>
+              <a:t>K-unitigs are uniquely assemble-able paths of K-</a:t>
             </a:r>
             <a:r>
               <a:rPr lang="en-US" dirty="0" err="1"/>
               <a:t>mers</a:t>
             </a:r>
+            <a:r>
+              <a:rPr lang="en-US" dirty="0"/>
+              <a:t> connected with K-1 exact overlaps</a:t>
+            </a:r>
+          </a:p>
+          <a:p>
+            <a:r>
+              <a:rPr lang="en-US" dirty="0"/>
+              <a:t>Paths must not contain any branches in forward or reverse direction</a:t>
+            </a:r>
+          </a:p>
+          <a:p>
+            <a:r>
+              <a:rPr lang="en-US" dirty="0"/>
+              <a:t>Pick a canonical K-mer, extend uniquely forward and backward checking for branches</a:t>
+            </a:r>
+          </a:p>
+          <a:p>
+            <a:pPr lvl="1"/>
+            <a:r>
+              <a:rPr lang="en-US" dirty="0"/>
+              <a:t>Do you need to check if K-</a:t>
+            </a:r>
+            <a:r>
+              <a:rPr lang="en-US" dirty="0" err="1"/>
+              <a:t>mer</a:t>
+            </a:r>
+            <a:r>
+              <a:rPr lang="en-US" dirty="0"/>
+              <a:t> has been used in a path before? </a:t>
+            </a:r>
+          </a:p>
+          <a:p>
+            <a:r>
+              <a:rPr lang="en-US" dirty="0"/>
+              <a:t>Stop extension and save the sequence if a forward or backward branch detected</a:t>
+            </a:r>
+          </a:p>
+          <a:p>
             <a:endParaRPr lang="en-US" dirty="0"/>
           </a:p>
         </p:txBody>
@@ -13874,7 +14089,7 @@
           <p:cNvPr id="4" name="Slide Number Placeholder 3">
             <a:extLst>
               <a:ext uri="{FF2B5EF4-FFF2-40B4-BE49-F238E27FC236}">
-                <a16:creationId xmlns:a16="http://schemas.microsoft.com/office/drawing/2014/main" id="{9C11AC7E-93BD-3248-0387-86D1E1B0BA2B}"/>
+                <a16:creationId xmlns:a16="http://schemas.microsoft.com/office/drawing/2014/main" id="{92D6FC87-C108-0A82-FD97-928713653782}"/>
               </a:ext>
             </a:extLst>
           </p:cNvPr>
@@ -13893,7 +14108,154 @@
             <a:fld id="{B82CCC60-E8CD-4174-8B1A-7DF615B22EEF}" type="slidenum">
               <a:rPr lang="en-US" smtClean="0"/>
               <a:pPr/>
-              <a:t>29</a:t>
+              <a:t>3</a:t>
+            </a:fld>
+            <a:endParaRPr lang="en-US"/>
+          </a:p>
+        </p:txBody>
+      </p:sp>
+    </p:spTree>
+    <p:extLst>
+      <p:ext uri="{BB962C8B-B14F-4D97-AF65-F5344CB8AC3E}">
+        <p14:creationId xmlns:p14="http://schemas.microsoft.com/office/powerpoint/2010/main" val="1172945794"/>
+      </p:ext>
+    </p:extLst>
+  </p:cSld>
+  <p:clrMapOvr>
+    <a:masterClrMapping/>
+  </p:clrMapOvr>
+</p:sld>
+</file>
+
+<file path=ppt/slides/slide30.xml><?xml version="1.0" encoding="utf-8"?>
+<p:sld xmlns:a="http://schemas.openxmlformats.org/drawingml/2006/main" xmlns:r="http://schemas.openxmlformats.org/officeDocument/2006/relationships" xmlns:p="http://schemas.openxmlformats.org/presentationml/2006/main">
+  <p:cSld>
+    <p:spTree>
+      <p:nvGrpSpPr>
+        <p:cNvPr id="1" name=""/>
+        <p:cNvGrpSpPr/>
+        <p:nvPr/>
+      </p:nvGrpSpPr>
+      <p:grpSpPr>
+        <a:xfrm>
+          <a:off x="0" y="0"/>
+          <a:ext cx="0" cy="0"/>
+          <a:chOff x="0" y="0"/>
+          <a:chExt cx="0" cy="0"/>
+        </a:xfrm>
+      </p:grpSpPr>
+      <p:sp>
+        <p:nvSpPr>
+          <p:cNvPr id="2" name="Title 1">
+            <a:extLst>
+              <a:ext uri="{FF2B5EF4-FFF2-40B4-BE49-F238E27FC236}">
+                <a16:creationId xmlns:a16="http://schemas.microsoft.com/office/drawing/2014/main" id="{E1992CFA-9895-FE23-736B-0ADCCDC9F354}"/>
+              </a:ext>
+            </a:extLst>
+          </p:cNvPr>
+          <p:cNvSpPr>
+            <a:spLocks noGrp="1"/>
+          </p:cNvSpPr>
+          <p:nvPr>
+            <p:ph type="title"/>
+          </p:nvPr>
+        </p:nvSpPr>
+        <p:spPr/>
+        <p:txBody>
+          <a:bodyPr>
+            <a:normAutofit fontScale="90000"/>
+          </a:bodyPr>
+          <a:lstStyle/>
+          <a:p>
+            <a:r>
+              <a:rPr lang="en-US" dirty="0"/>
+              <a:t>Characteristics of metagenomic data</a:t>
+            </a:r>
+          </a:p>
+        </p:txBody>
+      </p:sp>
+      <p:sp>
+        <p:nvSpPr>
+          <p:cNvPr id="3" name="Content Placeholder 2">
+            <a:extLst>
+              <a:ext uri="{FF2B5EF4-FFF2-40B4-BE49-F238E27FC236}">
+                <a16:creationId xmlns:a16="http://schemas.microsoft.com/office/drawing/2014/main" id="{B4F0B9E3-A9AD-BAD1-0027-F0D5944E8293}"/>
+              </a:ext>
+            </a:extLst>
+          </p:cNvPr>
+          <p:cNvSpPr>
+            <a:spLocks noGrp="1"/>
+          </p:cNvSpPr>
+          <p:nvPr>
+            <p:ph idx="1"/>
+          </p:nvPr>
+        </p:nvSpPr>
+        <p:spPr/>
+        <p:txBody>
+          <a:bodyPr/>
+          <a:lstStyle/>
+          <a:p>
+            <a:r>
+              <a:rPr lang="en-US" dirty="0"/>
+              <a:t>Typically short reads (Illumina)</a:t>
+            </a:r>
+          </a:p>
+          <a:p>
+            <a:r>
+              <a:rPr lang="en-US" dirty="0"/>
+              <a:t>Number of species: unknown</a:t>
+            </a:r>
+          </a:p>
+          <a:p>
+            <a:r>
+              <a:rPr lang="en-US" dirty="0"/>
+              <a:t>Coverage of each species: unknown</a:t>
+            </a:r>
+          </a:p>
+          <a:p>
+            <a:r>
+              <a:rPr lang="en-US" dirty="0"/>
+              <a:t>Assembly possible? Maybe, but similar species can assemble together forming chimeric contigs</a:t>
+            </a:r>
+          </a:p>
+          <a:p>
+            <a:r>
+              <a:rPr lang="en-US" dirty="0"/>
+              <a:t>Preferred mode of analysis: K-</a:t>
+            </a:r>
+            <a:r>
+              <a:rPr lang="en-US" dirty="0" err="1"/>
+              <a:t>mers</a:t>
+            </a:r>
+            <a:endParaRPr lang="en-US" dirty="0"/>
+          </a:p>
+        </p:txBody>
+      </p:sp>
+      <p:sp>
+        <p:nvSpPr>
+          <p:cNvPr id="4" name="Slide Number Placeholder 3">
+            <a:extLst>
+              <a:ext uri="{FF2B5EF4-FFF2-40B4-BE49-F238E27FC236}">
+                <a16:creationId xmlns:a16="http://schemas.microsoft.com/office/drawing/2014/main" id="{9C11AC7E-93BD-3248-0387-86D1E1B0BA2B}"/>
+              </a:ext>
+            </a:extLst>
+          </p:cNvPr>
+          <p:cNvSpPr>
+            <a:spLocks noGrp="1"/>
+          </p:cNvSpPr>
+          <p:nvPr>
+            <p:ph type="sldNum" sz="quarter" idx="12"/>
+          </p:nvPr>
+        </p:nvSpPr>
+        <p:spPr/>
+        <p:txBody>
+          <a:bodyPr/>
+          <a:lstStyle/>
+          <a:p>
+            <a:fld id="{B82CCC60-E8CD-4174-8B1A-7DF615B22EEF}" type="slidenum">
+              <a:rPr lang="en-US" smtClean="0"/>
+              <a:pPr/>
+              <a:t>30</a:t>
             </a:fld>
             <a:endParaRPr lang="en-US"/>
           </a:p>
@@ -14022,7 +14384,7 @@
 </p:sld>
 </file>
 
-<file path=ppt/slides/slide3.xml><?xml version="1.0" encoding="utf-8"?>
+<file path=ppt/slides/slide31.xml><?xml version="1.0" encoding="utf-8"?>
 <p:sld xmlns:a="http://schemas.openxmlformats.org/drawingml/2006/main" xmlns:r="http://schemas.openxmlformats.org/officeDocument/2006/relationships" xmlns:p="http://schemas.openxmlformats.org/presentationml/2006/main">
   <p:cSld>
     <p:spTree>
@@ -14044,7 +14406,7 @@
           <p:cNvPr id="2" name="Title 1">
             <a:extLst>
               <a:ext uri="{FF2B5EF4-FFF2-40B4-BE49-F238E27FC236}">
-                <a16:creationId xmlns:a16="http://schemas.microsoft.com/office/drawing/2014/main" id="{5FB40EF0-5913-D081-346D-D16D63755BA2}"/>
+                <a16:creationId xmlns:a16="http://schemas.microsoft.com/office/drawing/2014/main" id="{CF0CFA9E-52CD-A9B3-646D-3A27FD4536F0}"/>
               </a:ext>
             </a:extLst>
           </p:cNvPr>
@@ -14064,7 +14426,7 @@
           <a:p>
             <a:r>
               <a:rPr lang="en-US" dirty="0"/>
-              <a:t>K-unitigs</a:t>
+              <a:t>NCBI Taxonomy</a:t>
             </a:r>
           </a:p>
         </p:txBody>
@@ -14074,7 +14436,7 @@
           <p:cNvPr id="3" name="Content Placeholder 2">
             <a:extLst>
               <a:ext uri="{FF2B5EF4-FFF2-40B4-BE49-F238E27FC236}">
-                <a16:creationId xmlns:a16="http://schemas.microsoft.com/office/drawing/2014/main" id="{C7F3DDAB-4893-CF5C-98EF-F172D1CF7467}"/>
+                <a16:creationId xmlns:a16="http://schemas.microsoft.com/office/drawing/2014/main" id="{D79EF711-9CE8-F047-1D7A-D8E212100B1E}"/>
               </a:ext>
             </a:extLst>
           </p:cNvPr>
@@ -14085,59 +14447,34 @@
             <p:ph idx="1"/>
           </p:nvPr>
         </p:nvSpPr>
-        <p:spPr/>
-        <p:txBody>
-          <a:bodyPr/>
-          <a:lstStyle/>
-          <a:p>
-            <a:r>
-              <a:rPr lang="en-US" dirty="0"/>
-              <a:t>K-unitigs are uniquely assemble-able paths of K-</a:t>
-            </a:r>
-            <a:r>
-              <a:rPr lang="en-US" dirty="0" err="1"/>
-              <a:t>mers</a:t>
-            </a:r>
-            <a:r>
-              <a:rPr lang="en-US" dirty="0"/>
-              <a:t> connected with K-1 exact overlaps</a:t>
-            </a:r>
-          </a:p>
-          <a:p>
-            <a:r>
-              <a:rPr lang="en-US" dirty="0"/>
-              <a:t>Paths must not contain any branches in forward or reverse direction</a:t>
-            </a:r>
-          </a:p>
-          <a:p>
-            <a:r>
-              <a:rPr lang="en-US" dirty="0"/>
-              <a:t>Pick a canonical K-mer, extend uniquely forward and backward checking for branches</a:t>
-            </a:r>
-          </a:p>
-          <a:p>
-            <a:pPr lvl="1"/>
-            <a:r>
-              <a:rPr lang="en-US" dirty="0"/>
-              <a:t>Do you need to check if K-</a:t>
-            </a:r>
-            <a:r>
-              <a:rPr lang="en-US" dirty="0" err="1"/>
-              <a:t>mer</a:t>
-            </a:r>
-            <a:r>
-              <a:rPr lang="en-US" dirty="0"/>
-              <a:t> has been used in a path before? </a:t>
-            </a:r>
-          </a:p>
-          <a:p>
-            <a:r>
-              <a:rPr lang="en-US" dirty="0"/>
-              <a:t>Stop extension and save the sequence if a forward or backward branch detected</a:t>
-            </a:r>
-          </a:p>
-          <a:p>
-            <a:endParaRPr lang="en-US" dirty="0"/>
+        <p:spPr>
+          <a:xfrm>
+            <a:off x="598620" y="1596540"/>
+            <a:ext cx="6562576" cy="5124936"/>
+          </a:xfrm>
+        </p:spPr>
+        <p:txBody>
+          <a:bodyPr>
+            <a:normAutofit/>
+          </a:bodyPr>
+          <a:lstStyle/>
+          <a:p>
+            <a:r>
+              <a:rPr lang="en-US" dirty="0"/>
+              <a:t>The Taxonomy Database is a curated classification and nomenclature for all  organisms in the public sequence databases. </a:t>
+            </a:r>
+          </a:p>
+          <a:p>
+            <a:r>
+              <a:rPr lang="en-US" dirty="0"/>
+              <a:t>This currently represents about 10% of the described species of life on the planet.</a:t>
+            </a:r>
+          </a:p>
+          <a:p>
+            <a:r>
+              <a:rPr lang="en-US" dirty="0"/>
+              <a:t>All known species are part of NCBI Taxonomy tree.  Each node on the tree has a numerical ID</a:t>
+            </a:r>
           </a:p>
         </p:txBody>
       </p:sp>
@@ -14146,7 +14483,7 @@
           <p:cNvPr id="4" name="Slide Number Placeholder 3">
             <a:extLst>
               <a:ext uri="{FF2B5EF4-FFF2-40B4-BE49-F238E27FC236}">
-                <a16:creationId xmlns:a16="http://schemas.microsoft.com/office/drawing/2014/main" id="{92D6FC87-C108-0A82-FD97-928713653782}"/>
+                <a16:creationId xmlns:a16="http://schemas.microsoft.com/office/drawing/2014/main" id="{FB440318-2B73-4E92-84B2-305EBCA6D8AC}"/>
               </a:ext>
             </a:extLst>
           </p:cNvPr>
@@ -14165,144 +14502,7 @@
             <a:fld id="{B82CCC60-E8CD-4174-8B1A-7DF615B22EEF}" type="slidenum">
               <a:rPr lang="en-US" smtClean="0"/>
               <a:pPr/>
-              <a:t>3</a:t>
-            </a:fld>
-            <a:endParaRPr lang="en-US"/>
-          </a:p>
-        </p:txBody>
-      </p:sp>
-    </p:spTree>
-    <p:extLst>
-      <p:ext uri="{BB962C8B-B14F-4D97-AF65-F5344CB8AC3E}">
-        <p14:creationId xmlns:p14="http://schemas.microsoft.com/office/powerpoint/2010/main" val="1172945794"/>
-      </p:ext>
-    </p:extLst>
-  </p:cSld>
-  <p:clrMapOvr>
-    <a:masterClrMapping/>
-  </p:clrMapOvr>
-</p:sld>
-</file>
-
-<file path=ppt/slides/slide30.xml><?xml version="1.0" encoding="utf-8"?>
-<p:sld xmlns:a="http://schemas.openxmlformats.org/drawingml/2006/main" xmlns:r="http://schemas.openxmlformats.org/officeDocument/2006/relationships" xmlns:p="http://schemas.openxmlformats.org/presentationml/2006/main">
-  <p:cSld>
-    <p:spTree>
-      <p:nvGrpSpPr>
-        <p:cNvPr id="1" name=""/>
-        <p:cNvGrpSpPr/>
-        <p:nvPr/>
-      </p:nvGrpSpPr>
-      <p:grpSpPr>
-        <a:xfrm>
-          <a:off x="0" y="0"/>
-          <a:ext cx="0" cy="0"/>
-          <a:chOff x="0" y="0"/>
-          <a:chExt cx="0" cy="0"/>
-        </a:xfrm>
-      </p:grpSpPr>
-      <p:sp>
-        <p:nvSpPr>
-          <p:cNvPr id="2" name="Title 1">
-            <a:extLst>
-              <a:ext uri="{FF2B5EF4-FFF2-40B4-BE49-F238E27FC236}">
-                <a16:creationId xmlns:a16="http://schemas.microsoft.com/office/drawing/2014/main" id="{CF0CFA9E-52CD-A9B3-646D-3A27FD4536F0}"/>
-              </a:ext>
-            </a:extLst>
-          </p:cNvPr>
-          <p:cNvSpPr>
-            <a:spLocks noGrp="1"/>
-          </p:cNvSpPr>
-          <p:nvPr>
-            <p:ph type="title"/>
-          </p:nvPr>
-        </p:nvSpPr>
-        <p:spPr/>
-        <p:txBody>
-          <a:bodyPr>
-            <a:normAutofit fontScale="90000"/>
-          </a:bodyPr>
-          <a:lstStyle/>
-          <a:p>
-            <a:r>
-              <a:rPr lang="en-US" dirty="0"/>
-              <a:t>NCBI Taxonomy</a:t>
-            </a:r>
-          </a:p>
-        </p:txBody>
-      </p:sp>
-      <p:sp>
-        <p:nvSpPr>
-          <p:cNvPr id="3" name="Content Placeholder 2">
-            <a:extLst>
-              <a:ext uri="{FF2B5EF4-FFF2-40B4-BE49-F238E27FC236}">
-                <a16:creationId xmlns:a16="http://schemas.microsoft.com/office/drawing/2014/main" id="{D79EF711-9CE8-F047-1D7A-D8E212100B1E}"/>
-              </a:ext>
-            </a:extLst>
-          </p:cNvPr>
-          <p:cNvSpPr>
-            <a:spLocks noGrp="1"/>
-          </p:cNvSpPr>
-          <p:nvPr>
-            <p:ph idx="1"/>
-          </p:nvPr>
-        </p:nvSpPr>
-        <p:spPr>
-          <a:xfrm>
-            <a:off x="598620" y="1596540"/>
-            <a:ext cx="6562576" cy="5124936"/>
-          </a:xfrm>
-        </p:spPr>
-        <p:txBody>
-          <a:bodyPr>
-            <a:normAutofit/>
-          </a:bodyPr>
-          <a:lstStyle/>
-          <a:p>
-            <a:r>
-              <a:rPr lang="en-US" dirty="0"/>
-              <a:t>The Taxonomy Database is a curated classification and nomenclature for all  organisms in the public sequence databases. </a:t>
-            </a:r>
-          </a:p>
-          <a:p>
-            <a:r>
-              <a:rPr lang="en-US" dirty="0"/>
-              <a:t>This currently represents about 10% of the described species of life on the planet.</a:t>
-            </a:r>
-          </a:p>
-          <a:p>
-            <a:r>
-              <a:rPr lang="en-US" dirty="0"/>
-              <a:t>All known species are part of NCBI Taxonomy tree.  Each node on the tree has a numerical ID</a:t>
-            </a:r>
-          </a:p>
-        </p:txBody>
-      </p:sp>
-      <p:sp>
-        <p:nvSpPr>
-          <p:cNvPr id="4" name="Slide Number Placeholder 3">
-            <a:extLst>
-              <a:ext uri="{FF2B5EF4-FFF2-40B4-BE49-F238E27FC236}">
-                <a16:creationId xmlns:a16="http://schemas.microsoft.com/office/drawing/2014/main" id="{FB440318-2B73-4E92-84B2-305EBCA6D8AC}"/>
-              </a:ext>
-            </a:extLst>
-          </p:cNvPr>
-          <p:cNvSpPr>
-            <a:spLocks noGrp="1"/>
-          </p:cNvSpPr>
-          <p:nvPr>
-            <p:ph type="sldNum" sz="quarter" idx="12"/>
-          </p:nvPr>
-        </p:nvSpPr>
-        <p:spPr/>
-        <p:txBody>
-          <a:bodyPr/>
-          <a:lstStyle/>
-          <a:p>
-            <a:fld id="{B82CCC60-E8CD-4174-8B1A-7DF615B22EEF}" type="slidenum">
-              <a:rPr lang="en-US" smtClean="0"/>
-              <a:pPr/>
-              <a:t>30</a:t>
+              <a:t>31</a:t>
             </a:fld>
             <a:endParaRPr lang="en-US"/>
           </a:p>
@@ -14351,7 +14551,7 @@
 </p:sld>
 </file>
 
-<file path=ppt/slides/slide31.xml><?xml version="1.0" encoding="utf-8"?>
+<file path=ppt/slides/slide32.xml><?xml version="1.0" encoding="utf-8"?>
 <p:sld xmlns:a="http://schemas.openxmlformats.org/drawingml/2006/main" xmlns:r="http://schemas.openxmlformats.org/officeDocument/2006/relationships" xmlns:p="http://schemas.openxmlformats.org/presentationml/2006/main">
   <p:cSld>
     <p:spTree>
@@ -14464,7 +14664,7 @@
             <a:fld id="{B82CCC60-E8CD-4174-8B1A-7DF615B22EEF}" type="slidenum">
               <a:rPr lang="en-US" smtClean="0"/>
               <a:pPr/>
-              <a:t>31</a:t>
+              <a:t>32</a:t>
             </a:fld>
             <a:endParaRPr lang="en-US"/>
           </a:p>
@@ -14513,7 +14713,7 @@
 </p:sld>
 </file>
 
-<file path=ppt/slides/slide32.xml><?xml version="1.0" encoding="utf-8"?>
+<file path=ppt/slides/slide33.xml><?xml version="1.0" encoding="utf-8"?>
 <p:sld xmlns:a="http://schemas.openxmlformats.org/drawingml/2006/main" xmlns:r="http://schemas.openxmlformats.org/officeDocument/2006/relationships" xmlns:p="http://schemas.openxmlformats.org/presentationml/2006/main">
   <p:cSld>
     <p:spTree>
@@ -14686,7 +14886,7 @@
             <a:fld id="{B82CCC60-E8CD-4174-8B1A-7DF615B22EEF}" type="slidenum">
               <a:rPr lang="en-US" smtClean="0"/>
               <a:pPr/>
-              <a:t>32</a:t>
+              <a:t>33</a:t>
             </a:fld>
             <a:endParaRPr lang="en-US"/>
           </a:p>
@@ -15592,7 +15792,7 @@
 </p:sld>
 </file>
 
-<file path=ppt/slides/slide33.xml><?xml version="1.0" encoding="utf-8"?>
+<file path=ppt/slides/slide34.xml><?xml version="1.0" encoding="utf-8"?>
 <p:sld xmlns:a="http://schemas.openxmlformats.org/drawingml/2006/main" xmlns:r="http://schemas.openxmlformats.org/officeDocument/2006/relationships" xmlns:p="http://schemas.openxmlformats.org/presentationml/2006/main">
   <p:cSld>
     <p:spTree>
@@ -15771,7 +15971,7 @@
             <a:fld id="{B82CCC60-E8CD-4174-8B1A-7DF615B22EEF}" type="slidenum">
               <a:rPr lang="en-US" smtClean="0"/>
               <a:pPr/>
-              <a:t>33</a:t>
+              <a:t>34</a:t>
             </a:fld>
             <a:endParaRPr lang="en-US"/>
           </a:p>
@@ -15820,7 +16020,7 @@
 </p:sld>
 </file>
 
-<file path=ppt/slides/slide34.xml><?xml version="1.0" encoding="utf-8"?>
+<file path=ppt/slides/slide35.xml><?xml version="1.0" encoding="utf-8"?>
 <p:sld xmlns:a="http://schemas.openxmlformats.org/drawingml/2006/main" xmlns:r="http://schemas.openxmlformats.org/officeDocument/2006/relationships" xmlns:p="http://schemas.openxmlformats.org/presentationml/2006/main">
   <p:cSld>
     <p:spTree>
@@ -15969,7 +16169,7 @@
             <a:fld id="{B82CCC60-E8CD-4174-8B1A-7DF615B22EEF}" type="slidenum">
               <a:rPr lang="en-US" smtClean="0"/>
               <a:pPr/>
-              <a:t>34</a:t>
+              <a:t>35</a:t>
             </a:fld>
             <a:endParaRPr lang="en-US"/>
           </a:p>
@@ -15988,7 +16188,7 @@
 </p:sld>
 </file>
 
-<file path=ppt/slides/slide35.xml><?xml version="1.0" encoding="utf-8"?>
+<file path=ppt/slides/slide36.xml><?xml version="1.0" encoding="utf-8"?>
 <p:sld xmlns:a="http://schemas.openxmlformats.org/drawingml/2006/main" xmlns:r="http://schemas.openxmlformats.org/officeDocument/2006/relationships" xmlns:p="http://schemas.openxmlformats.org/presentationml/2006/main">
   <p:cSld>
     <p:spTree>
@@ -16135,7 +16335,7 @@
             <a:fld id="{B82CCC60-E8CD-4174-8B1A-7DF615B22EEF}" type="slidenum">
               <a:rPr lang="en-US" smtClean="0"/>
               <a:pPr/>
-              <a:t>35</a:t>
+              <a:t>36</a:t>
             </a:fld>
             <a:endParaRPr lang="en-US"/>
           </a:p>
@@ -16184,180 +16384,6 @@
 </p:sld>
 </file>
 
-<file path=ppt/slides/slide36.xml><?xml version="1.0" encoding="utf-8"?>
-<p:sld xmlns:a="http://schemas.openxmlformats.org/drawingml/2006/main" xmlns:r="http://schemas.openxmlformats.org/officeDocument/2006/relationships" xmlns:p="http://schemas.openxmlformats.org/presentationml/2006/main">
-  <p:cSld>
-    <p:spTree>
-      <p:nvGrpSpPr>
-        <p:cNvPr id="1" name=""/>
-        <p:cNvGrpSpPr/>
-        <p:nvPr/>
-      </p:nvGrpSpPr>
-      <p:grpSpPr>
-        <a:xfrm>
-          <a:off x="0" y="0"/>
-          <a:ext cx="0" cy="0"/>
-          <a:chOff x="0" y="0"/>
-          <a:chExt cx="0" cy="0"/>
-        </a:xfrm>
-      </p:grpSpPr>
-      <p:sp>
-        <p:nvSpPr>
-          <p:cNvPr id="2" name="Title 1">
-            <a:extLst>
-              <a:ext uri="{FF2B5EF4-FFF2-40B4-BE49-F238E27FC236}">
-                <a16:creationId xmlns:a16="http://schemas.microsoft.com/office/drawing/2014/main" id="{587432BC-F28F-CB44-3A6A-24FD3E899FE7}"/>
-              </a:ext>
-            </a:extLst>
-          </p:cNvPr>
-          <p:cNvSpPr>
-            <a:spLocks noGrp="1"/>
-          </p:cNvSpPr>
-          <p:nvPr>
-            <p:ph type="title"/>
-          </p:nvPr>
-        </p:nvSpPr>
-        <p:spPr/>
-        <p:txBody>
-          <a:bodyPr>
-            <a:normAutofit fontScale="90000"/>
-          </a:bodyPr>
-          <a:lstStyle/>
-          <a:p>
-            <a:r>
-              <a:rPr lang="en-US" dirty="0"/>
-              <a:t>Making sense of genomic sequence</a:t>
-            </a:r>
-          </a:p>
-        </p:txBody>
-      </p:sp>
-      <p:sp>
-        <p:nvSpPr>
-          <p:cNvPr id="3" name="Content Placeholder 2">
-            <a:extLst>
-              <a:ext uri="{FF2B5EF4-FFF2-40B4-BE49-F238E27FC236}">
-                <a16:creationId xmlns:a16="http://schemas.microsoft.com/office/drawing/2014/main" id="{3FAB2AAB-32CD-6C80-DBE6-A5E636746884}"/>
-              </a:ext>
-            </a:extLst>
-          </p:cNvPr>
-          <p:cNvSpPr>
-            <a:spLocks noGrp="1"/>
-          </p:cNvSpPr>
-          <p:nvPr>
-            <p:ph idx="1"/>
-          </p:nvPr>
-        </p:nvSpPr>
-        <p:spPr>
-          <a:xfrm>
-            <a:off x="598620" y="1596540"/>
-            <a:ext cx="10972800" cy="4759811"/>
-          </a:xfrm>
-        </p:spPr>
-        <p:txBody>
-          <a:bodyPr>
-            <a:normAutofit/>
-          </a:bodyPr>
-          <a:lstStyle/>
-          <a:p>
-            <a:r>
-              <a:rPr lang="en-US" dirty="0"/>
-              <a:t>We assembled the genome – what is next?</a:t>
-            </a:r>
-          </a:p>
-          <a:p>
-            <a:r>
-              <a:rPr lang="en-US" dirty="0"/>
-              <a:t>We can identify functionally important elements (subsequences):</a:t>
-            </a:r>
-          </a:p>
-          <a:p>
-            <a:pPr lvl="1"/>
-            <a:r>
-              <a:rPr lang="en-US" dirty="0"/>
-              <a:t>Genes</a:t>
-            </a:r>
-          </a:p>
-          <a:p>
-            <a:pPr lvl="1"/>
-            <a:r>
-              <a:rPr lang="en-US" dirty="0"/>
-              <a:t>Protein coding regions</a:t>
-            </a:r>
-          </a:p>
-          <a:p>
-            <a:pPr lvl="1"/>
-            <a:r>
-              <a:rPr lang="en-US" dirty="0"/>
-              <a:t>Regulatory elements</a:t>
-            </a:r>
-          </a:p>
-          <a:p>
-            <a:pPr lvl="1"/>
-            <a:r>
-              <a:rPr lang="en-US" dirty="0"/>
-              <a:t>This is called </a:t>
-            </a:r>
-            <a:r>
-              <a:rPr lang="en-US" i="1" dirty="0"/>
-              <a:t>genome annotation</a:t>
-            </a:r>
-          </a:p>
-          <a:p>
-            <a:r>
-              <a:rPr lang="en-US" i="1" dirty="0"/>
-              <a:t>Genome annotation </a:t>
-            </a:r>
-            <a:r>
-              <a:rPr lang="en-US" dirty="0"/>
-              <a:t>provides coordinates (start, stop and strand) and identifies function of functional elements in the genomic sequence</a:t>
-            </a:r>
-            <a:endParaRPr lang="en-US" i="1" dirty="0"/>
-          </a:p>
-        </p:txBody>
-      </p:sp>
-      <p:sp>
-        <p:nvSpPr>
-          <p:cNvPr id="4" name="Slide Number Placeholder 3">
-            <a:extLst>
-              <a:ext uri="{FF2B5EF4-FFF2-40B4-BE49-F238E27FC236}">
-                <a16:creationId xmlns:a16="http://schemas.microsoft.com/office/drawing/2014/main" id="{2B709678-CD1E-EF3C-E7B0-557C6BD58873}"/>
-              </a:ext>
-            </a:extLst>
-          </p:cNvPr>
-          <p:cNvSpPr>
-            <a:spLocks noGrp="1"/>
-          </p:cNvSpPr>
-          <p:nvPr>
-            <p:ph type="sldNum" sz="quarter" idx="12"/>
-          </p:nvPr>
-        </p:nvSpPr>
-        <p:spPr/>
-        <p:txBody>
-          <a:bodyPr/>
-          <a:lstStyle/>
-          <a:p>
-            <a:fld id="{B82CCC60-E8CD-4174-8B1A-7DF615B22EEF}" type="slidenum">
-              <a:rPr lang="en-US" smtClean="0"/>
-              <a:pPr/>
-              <a:t>36</a:t>
-            </a:fld>
-            <a:endParaRPr lang="en-US"/>
-          </a:p>
-        </p:txBody>
-      </p:sp>
-    </p:spTree>
-    <p:extLst>
-      <p:ext uri="{BB962C8B-B14F-4D97-AF65-F5344CB8AC3E}">
-        <p14:creationId xmlns:p14="http://schemas.microsoft.com/office/powerpoint/2010/main" val="2697071189"/>
-      </p:ext>
-    </p:extLst>
-  </p:cSld>
-  <p:clrMapOvr>
-    <a:masterClrMapping/>
-  </p:clrMapOvr>
-</p:sld>
-</file>
-
 <file path=ppt/slides/slide37.xml><?xml version="1.0" encoding="utf-8"?>
 <p:sld xmlns:a="http://schemas.openxmlformats.org/drawingml/2006/main" xmlns:r="http://schemas.openxmlformats.org/officeDocument/2006/relationships" xmlns:p="http://schemas.openxmlformats.org/presentationml/2006/main">
   <p:cSld>
@@ -16380,7 +16406,7 @@
           <p:cNvPr id="2" name="Title 1">
             <a:extLst>
               <a:ext uri="{FF2B5EF4-FFF2-40B4-BE49-F238E27FC236}">
-                <a16:creationId xmlns:a16="http://schemas.microsoft.com/office/drawing/2014/main" id="{44CCB229-F05B-9C72-C7AC-C9C4E770B563}"/>
+                <a16:creationId xmlns:a16="http://schemas.microsoft.com/office/drawing/2014/main" id="{587432BC-F28F-CB44-3A6A-24FD3E899FE7}"/>
               </a:ext>
             </a:extLst>
           </p:cNvPr>
@@ -16400,47 +16426,17 @@
           <a:p>
             <a:r>
               <a:rPr lang="en-US" dirty="0"/>
-              <a:t>How transcription + translation works?</a:t>
-            </a:r>
-          </a:p>
-        </p:txBody>
-      </p:sp>
-      <p:pic>
-        <p:nvPicPr>
-          <p:cNvPr id="5" name="Picture 4">
-            <a:extLst>
-              <a:ext uri="{FF2B5EF4-FFF2-40B4-BE49-F238E27FC236}">
-                <a16:creationId xmlns:a16="http://schemas.microsoft.com/office/drawing/2014/main" id="{4F2E8170-E86A-1FC5-986A-6762D834E690}"/>
-              </a:ext>
-            </a:extLst>
-          </p:cNvPr>
-          <p:cNvPicPr>
-            <a:picLocks noChangeAspect="1"/>
-          </p:cNvPicPr>
-          <p:nvPr/>
-        </p:nvPicPr>
-        <p:blipFill>
-          <a:blip r:embed="rId3"/>
-          <a:stretch>
-            <a:fillRect/>
-          </a:stretch>
-        </p:blipFill>
-        <p:spPr>
-          <a:xfrm>
-            <a:off x="271921" y="1457739"/>
-            <a:ext cx="6770056" cy="5400261"/>
-          </a:xfrm>
-          <a:prstGeom prst="rect">
-            <a:avLst/>
-          </a:prstGeom>
-        </p:spPr>
-      </p:pic>
-      <p:sp>
-        <p:nvSpPr>
-          <p:cNvPr id="6" name="Content Placeholder 2">
-            <a:extLst>
-              <a:ext uri="{FF2B5EF4-FFF2-40B4-BE49-F238E27FC236}">
-                <a16:creationId xmlns:a16="http://schemas.microsoft.com/office/drawing/2014/main" id="{FA4D5DA9-CA09-D0F9-E6B9-42615BC1B89C}"/>
+              <a:t>Making sense of genomic sequence</a:t>
+            </a:r>
+          </a:p>
+        </p:txBody>
+      </p:sp>
+      <p:sp>
+        <p:nvSpPr>
+          <p:cNvPr id="3" name="Content Placeholder 2">
+            <a:extLst>
+              <a:ext uri="{FF2B5EF4-FFF2-40B4-BE49-F238E27FC236}">
+                <a16:creationId xmlns:a16="http://schemas.microsoft.com/office/drawing/2014/main" id="{3FAB2AAB-32CD-6C80-DBE6-A5E636746884}"/>
               </a:ext>
             </a:extLst>
           </p:cNvPr>
@@ -16453,70 +16449,106 @@
         </p:nvSpPr>
         <p:spPr>
           <a:xfrm>
-            <a:off x="7276563" y="1457738"/>
-            <a:ext cx="4915437" cy="5400261"/>
+            <a:off x="598620" y="1596540"/>
+            <a:ext cx="10972800" cy="4759811"/>
           </a:xfrm>
         </p:spPr>
         <p:txBody>
+          <a:bodyPr>
+            <a:normAutofit/>
+          </a:bodyPr>
+          <a:lstStyle/>
+          <a:p>
+            <a:r>
+              <a:rPr lang="en-US" dirty="0"/>
+              <a:t>We assembled the genome – what is next?</a:t>
+            </a:r>
+          </a:p>
+          <a:p>
+            <a:r>
+              <a:rPr lang="en-US" dirty="0"/>
+              <a:t>We can identify functionally important elements (subsequences):</a:t>
+            </a:r>
+          </a:p>
+          <a:p>
+            <a:pPr lvl="1"/>
+            <a:r>
+              <a:rPr lang="en-US" dirty="0"/>
+              <a:t>Genes</a:t>
+            </a:r>
+          </a:p>
+          <a:p>
+            <a:pPr lvl="1"/>
+            <a:r>
+              <a:rPr lang="en-US" dirty="0"/>
+              <a:t>Protein coding regions</a:t>
+            </a:r>
+          </a:p>
+          <a:p>
+            <a:pPr lvl="1"/>
+            <a:r>
+              <a:rPr lang="en-US" dirty="0"/>
+              <a:t>Regulatory elements</a:t>
+            </a:r>
+          </a:p>
+          <a:p>
+            <a:pPr lvl="1"/>
+            <a:r>
+              <a:rPr lang="en-US" dirty="0"/>
+              <a:t>This is called </a:t>
+            </a:r>
+            <a:r>
+              <a:rPr lang="en-US" i="1" dirty="0"/>
+              <a:t>genome annotation</a:t>
+            </a:r>
+          </a:p>
+          <a:p>
+            <a:r>
+              <a:rPr lang="en-US" i="1" dirty="0"/>
+              <a:t>Genome annotation </a:t>
+            </a:r>
+            <a:r>
+              <a:rPr lang="en-US" dirty="0"/>
+              <a:t>provides coordinates (start, stop and strand) and identifies function of functional elements in the genomic sequence</a:t>
+            </a:r>
+            <a:endParaRPr lang="en-US" i="1" dirty="0"/>
+          </a:p>
+        </p:txBody>
+      </p:sp>
+      <p:sp>
+        <p:nvSpPr>
+          <p:cNvPr id="4" name="Slide Number Placeholder 3">
+            <a:extLst>
+              <a:ext uri="{FF2B5EF4-FFF2-40B4-BE49-F238E27FC236}">
+                <a16:creationId xmlns:a16="http://schemas.microsoft.com/office/drawing/2014/main" id="{2B709678-CD1E-EF3C-E7B0-557C6BD58873}"/>
+              </a:ext>
+            </a:extLst>
+          </p:cNvPr>
+          <p:cNvSpPr>
+            <a:spLocks noGrp="1"/>
+          </p:cNvSpPr>
+          <p:nvPr>
+            <p:ph type="sldNum" sz="quarter" idx="12"/>
+          </p:nvPr>
+        </p:nvSpPr>
+        <p:spPr/>
+        <p:txBody>
           <a:bodyPr/>
           <a:lstStyle/>
           <a:p>
-            <a:r>
-              <a:rPr lang="en-US" b="0" i="0" dirty="0">
-                <a:solidFill>
-                  <a:srgbClr val="1B1B1B"/>
-                </a:solidFill>
-                <a:effectLst/>
-              </a:rPr>
-              <a:t>Transcription and translation are processes a cell uses to make all proteins the organism needs to function from information stored in the sequence of bases in DNA</a:t>
-            </a:r>
-          </a:p>
-          <a:p>
-            <a:r>
-              <a:rPr lang="en-US" dirty="0">
-                <a:solidFill>
-                  <a:srgbClr val="1B1B1B"/>
-                </a:solidFill>
-              </a:rPr>
-              <a:t>Pre-mRNA has introns</a:t>
-            </a:r>
-          </a:p>
-          <a:p>
-            <a:r>
-              <a:rPr lang="en-US" b="0" i="0" dirty="0">
-                <a:solidFill>
-                  <a:srgbClr val="1B1B1B"/>
-                </a:solidFill>
-                <a:effectLst/>
-              </a:rPr>
-              <a:t>mRNA has introns spliced out</a:t>
-            </a:r>
-          </a:p>
-          <a:p>
-            <a:r>
-              <a:rPr lang="en-US" dirty="0">
-                <a:solidFill>
-                  <a:srgbClr val="1B1B1B"/>
-                </a:solidFill>
-              </a:rPr>
-              <a:t>Transcript is mRNA with U’s replaced by T’s</a:t>
-            </a:r>
-            <a:endParaRPr lang="en-US" b="0" i="0" dirty="0">
-              <a:solidFill>
-                <a:srgbClr val="1B1B1B"/>
-              </a:solidFill>
-              <a:effectLst/>
-            </a:endParaRPr>
-          </a:p>
-          <a:p>
-            <a:endParaRPr lang="en-US" dirty="0"/>
+            <a:fld id="{B82CCC60-E8CD-4174-8B1A-7DF615B22EEF}" type="slidenum">
+              <a:rPr lang="en-US" smtClean="0"/>
+              <a:pPr/>
+              <a:t>37</a:t>
+            </a:fld>
+            <a:endParaRPr lang="en-US"/>
           </a:p>
         </p:txBody>
       </p:sp>
     </p:spTree>
     <p:extLst>
       <p:ext uri="{BB962C8B-B14F-4D97-AF65-F5344CB8AC3E}">
-        <p14:creationId xmlns:p14="http://schemas.microsoft.com/office/powerpoint/2010/main" val="2537393782"/>
+        <p14:creationId xmlns:p14="http://schemas.microsoft.com/office/powerpoint/2010/main" val="2697071189"/>
       </p:ext>
     </p:extLst>
   </p:cSld>
@@ -16548,7 +16580,7 @@
           <p:cNvPr id="2" name="Title 1">
             <a:extLst>
               <a:ext uri="{FF2B5EF4-FFF2-40B4-BE49-F238E27FC236}">
-                <a16:creationId xmlns:a16="http://schemas.microsoft.com/office/drawing/2014/main" id="{954A28ED-23E7-0DD9-698A-54638488F9BA}"/>
+                <a16:creationId xmlns:a16="http://schemas.microsoft.com/office/drawing/2014/main" id="{44CCB229-F05B-9C72-C7AC-C9C4E770B563}"/>
               </a:ext>
             </a:extLst>
           </p:cNvPr>
@@ -16568,17 +16600,47 @@
           <a:p>
             <a:r>
               <a:rPr lang="en-US" dirty="0"/>
-              <a:t>Splicing</a:t>
-            </a:r>
-          </a:p>
-        </p:txBody>
-      </p:sp>
-      <p:sp>
-        <p:nvSpPr>
-          <p:cNvPr id="3" name="Content Placeholder 2">
-            <a:extLst>
-              <a:ext uri="{FF2B5EF4-FFF2-40B4-BE49-F238E27FC236}">
-                <a16:creationId xmlns:a16="http://schemas.microsoft.com/office/drawing/2014/main" id="{F16D4F4A-7104-01C8-D998-62D6074CEEB9}"/>
+              <a:t>How transcription + translation works?</a:t>
+            </a:r>
+          </a:p>
+        </p:txBody>
+      </p:sp>
+      <p:pic>
+        <p:nvPicPr>
+          <p:cNvPr id="5" name="Picture 4">
+            <a:extLst>
+              <a:ext uri="{FF2B5EF4-FFF2-40B4-BE49-F238E27FC236}">
+                <a16:creationId xmlns:a16="http://schemas.microsoft.com/office/drawing/2014/main" id="{4F2E8170-E86A-1FC5-986A-6762D834E690}"/>
+              </a:ext>
+            </a:extLst>
+          </p:cNvPr>
+          <p:cNvPicPr>
+            <a:picLocks noChangeAspect="1"/>
+          </p:cNvPicPr>
+          <p:nvPr/>
+        </p:nvPicPr>
+        <p:blipFill>
+          <a:blip r:embed="rId3"/>
+          <a:stretch>
+            <a:fillRect/>
+          </a:stretch>
+        </p:blipFill>
+        <p:spPr>
+          <a:xfrm>
+            <a:off x="271921" y="1457739"/>
+            <a:ext cx="6770056" cy="5400261"/>
+          </a:xfrm>
+          <a:prstGeom prst="rect">
+            <a:avLst/>
+          </a:prstGeom>
+        </p:spPr>
+      </p:pic>
+      <p:sp>
+        <p:nvSpPr>
+          <p:cNvPr id="6" name="Content Placeholder 2">
+            <a:extLst>
+              <a:ext uri="{FF2B5EF4-FFF2-40B4-BE49-F238E27FC236}">
+                <a16:creationId xmlns:a16="http://schemas.microsoft.com/office/drawing/2014/main" id="{FA4D5DA9-CA09-D0F9-E6B9-42615BC1B89C}"/>
               </a:ext>
             </a:extLst>
           </p:cNvPr>
@@ -16591,6 +16653,144 @@
         </p:nvSpPr>
         <p:spPr>
           <a:xfrm>
+            <a:off x="7276563" y="1457738"/>
+            <a:ext cx="4915437" cy="5400261"/>
+          </a:xfrm>
+        </p:spPr>
+        <p:txBody>
+          <a:bodyPr/>
+          <a:lstStyle/>
+          <a:p>
+            <a:r>
+              <a:rPr lang="en-US" b="0" i="0" dirty="0">
+                <a:solidFill>
+                  <a:srgbClr val="1B1B1B"/>
+                </a:solidFill>
+                <a:effectLst/>
+              </a:rPr>
+              <a:t>Transcription and translation are processes a cell uses to make all proteins the organism needs to function from information stored in the sequence of bases in DNA</a:t>
+            </a:r>
+          </a:p>
+          <a:p>
+            <a:r>
+              <a:rPr lang="en-US" dirty="0">
+                <a:solidFill>
+                  <a:srgbClr val="1B1B1B"/>
+                </a:solidFill>
+              </a:rPr>
+              <a:t>Pre-mRNA has introns</a:t>
+            </a:r>
+          </a:p>
+          <a:p>
+            <a:r>
+              <a:rPr lang="en-US" b="0" i="0" dirty="0">
+                <a:solidFill>
+                  <a:srgbClr val="1B1B1B"/>
+                </a:solidFill>
+                <a:effectLst/>
+              </a:rPr>
+              <a:t>mRNA has introns spliced out</a:t>
+            </a:r>
+          </a:p>
+          <a:p>
+            <a:r>
+              <a:rPr lang="en-US" dirty="0">
+                <a:solidFill>
+                  <a:srgbClr val="1B1B1B"/>
+                </a:solidFill>
+              </a:rPr>
+              <a:t>Transcript is mRNA with U’s replaced by T’s</a:t>
+            </a:r>
+            <a:endParaRPr lang="en-US" b="0" i="0" dirty="0">
+              <a:solidFill>
+                <a:srgbClr val="1B1B1B"/>
+              </a:solidFill>
+              <a:effectLst/>
+            </a:endParaRPr>
+          </a:p>
+          <a:p>
+            <a:endParaRPr lang="en-US" dirty="0"/>
+          </a:p>
+        </p:txBody>
+      </p:sp>
+    </p:spTree>
+    <p:extLst>
+      <p:ext uri="{BB962C8B-B14F-4D97-AF65-F5344CB8AC3E}">
+        <p14:creationId xmlns:p14="http://schemas.microsoft.com/office/powerpoint/2010/main" val="2537393782"/>
+      </p:ext>
+    </p:extLst>
+  </p:cSld>
+  <p:clrMapOvr>
+    <a:masterClrMapping/>
+  </p:clrMapOvr>
+</p:sld>
+</file>
+
+<file path=ppt/slides/slide39.xml><?xml version="1.0" encoding="utf-8"?>
+<p:sld xmlns:a="http://schemas.openxmlformats.org/drawingml/2006/main" xmlns:r="http://schemas.openxmlformats.org/officeDocument/2006/relationships" xmlns:p="http://schemas.openxmlformats.org/presentationml/2006/main">
+  <p:cSld>
+    <p:spTree>
+      <p:nvGrpSpPr>
+        <p:cNvPr id="1" name=""/>
+        <p:cNvGrpSpPr/>
+        <p:nvPr/>
+      </p:nvGrpSpPr>
+      <p:grpSpPr>
+        <a:xfrm>
+          <a:off x="0" y="0"/>
+          <a:ext cx="0" cy="0"/>
+          <a:chOff x="0" y="0"/>
+          <a:chExt cx="0" cy="0"/>
+        </a:xfrm>
+      </p:grpSpPr>
+      <p:sp>
+        <p:nvSpPr>
+          <p:cNvPr id="2" name="Title 1">
+            <a:extLst>
+              <a:ext uri="{FF2B5EF4-FFF2-40B4-BE49-F238E27FC236}">
+                <a16:creationId xmlns:a16="http://schemas.microsoft.com/office/drawing/2014/main" id="{954A28ED-23E7-0DD9-698A-54638488F9BA}"/>
+              </a:ext>
+            </a:extLst>
+          </p:cNvPr>
+          <p:cNvSpPr>
+            <a:spLocks noGrp="1"/>
+          </p:cNvSpPr>
+          <p:nvPr>
+            <p:ph type="title"/>
+          </p:nvPr>
+        </p:nvSpPr>
+        <p:spPr/>
+        <p:txBody>
+          <a:bodyPr>
+            <a:normAutofit fontScale="90000"/>
+          </a:bodyPr>
+          <a:lstStyle/>
+          <a:p>
+            <a:r>
+              <a:rPr lang="en-US" dirty="0"/>
+              <a:t>Splicing</a:t>
+            </a:r>
+          </a:p>
+        </p:txBody>
+      </p:sp>
+      <p:sp>
+        <p:nvSpPr>
+          <p:cNvPr id="3" name="Content Placeholder 2">
+            <a:extLst>
+              <a:ext uri="{FF2B5EF4-FFF2-40B4-BE49-F238E27FC236}">
+                <a16:creationId xmlns:a16="http://schemas.microsoft.com/office/drawing/2014/main" id="{F16D4F4A-7104-01C8-D998-62D6074CEEB9}"/>
+              </a:ext>
+            </a:extLst>
+          </p:cNvPr>
+          <p:cNvSpPr>
+            <a:spLocks noGrp="1"/>
+          </p:cNvSpPr>
+          <p:nvPr>
+            <p:ph idx="1"/>
+          </p:nvPr>
+        </p:nvSpPr>
+        <p:spPr>
+          <a:xfrm>
             <a:off x="598620" y="1596540"/>
             <a:ext cx="5908058" cy="5124936"/>
           </a:xfrm>
@@ -16644,7 +16844,7 @@
             <a:fld id="{B82CCC60-E8CD-4174-8B1A-7DF615B22EEF}" type="slidenum">
               <a:rPr lang="en-US" smtClean="0"/>
               <a:pPr/>
-              <a:t>38</a:t>
+              <a:t>39</a:t>
             </a:fld>
             <a:endParaRPr lang="en-US"/>
           </a:p>
@@ -16693,111 +16893,6 @@
 </p:sld>
 </file>
 
-<file path=ppt/slides/slide39.xml><?xml version="1.0" encoding="utf-8"?>
-<p:sld xmlns:a="http://schemas.openxmlformats.org/drawingml/2006/main" xmlns:r="http://schemas.openxmlformats.org/officeDocument/2006/relationships" xmlns:p="http://schemas.openxmlformats.org/presentationml/2006/main">
-  <p:cSld>
-    <p:spTree>
-      <p:nvGrpSpPr>
-        <p:cNvPr id="1" name=""/>
-        <p:cNvGrpSpPr/>
-        <p:nvPr/>
-      </p:nvGrpSpPr>
-      <p:grpSpPr>
-        <a:xfrm>
-          <a:off x="0" y="0"/>
-          <a:ext cx="0" cy="0"/>
-          <a:chOff x="0" y="0"/>
-          <a:chExt cx="0" cy="0"/>
-        </a:xfrm>
-      </p:grpSpPr>
-      <p:sp>
-        <p:nvSpPr>
-          <p:cNvPr id="2" name="Title 1">
-            <a:extLst>
-              <a:ext uri="{FF2B5EF4-FFF2-40B4-BE49-F238E27FC236}">
-                <a16:creationId xmlns:a16="http://schemas.microsoft.com/office/drawing/2014/main" id="{EB450FA3-F17D-8199-C237-6A2CF51777EA}"/>
-              </a:ext>
-            </a:extLst>
-          </p:cNvPr>
-          <p:cNvSpPr>
-            <a:spLocks noGrp="1"/>
-          </p:cNvSpPr>
-          <p:nvPr>
-            <p:ph type="title"/>
-          </p:nvPr>
-        </p:nvSpPr>
-        <p:spPr/>
-        <p:txBody>
-          <a:bodyPr>
-            <a:normAutofit fontScale="90000"/>
-          </a:bodyPr>
-          <a:lstStyle/>
-          <a:p>
-            <a:r>
-              <a:rPr lang="en-US" dirty="0"/>
-              <a:t>Poly-A tail</a:t>
-            </a:r>
-          </a:p>
-        </p:txBody>
-      </p:sp>
-      <p:sp>
-        <p:nvSpPr>
-          <p:cNvPr id="3" name="Content Placeholder 2">
-            <a:extLst>
-              <a:ext uri="{FF2B5EF4-FFF2-40B4-BE49-F238E27FC236}">
-                <a16:creationId xmlns:a16="http://schemas.microsoft.com/office/drawing/2014/main" id="{1346F293-779C-02FF-E46E-9CF199A76A37}"/>
-              </a:ext>
-            </a:extLst>
-          </p:cNvPr>
-          <p:cNvSpPr>
-            <a:spLocks noGrp="1"/>
-          </p:cNvSpPr>
-          <p:nvPr>
-            <p:ph idx="1"/>
-          </p:nvPr>
-        </p:nvSpPr>
-        <p:spPr>
-          <a:xfrm>
-            <a:off x="838200" y="1825624"/>
-            <a:ext cx="10515600" cy="4585933"/>
-          </a:xfrm>
-        </p:spPr>
-        <p:txBody>
-          <a:bodyPr/>
-          <a:lstStyle/>
-          <a:p>
-            <a:r>
-              <a:rPr lang="en-US" dirty="0"/>
-              <a:t>The poly-A tail is a long chain of Adenine nucleotides that is added to a messenger RNA (mRNA) molecule during RNA processing to increase the stability of the molecule</a:t>
-            </a:r>
-          </a:p>
-          <a:p>
-            <a:r>
-              <a:rPr lang="en-US" dirty="0"/>
-              <a:t>Processing of the 3' end adds a poly-A tail to the RNA molecule that is between 100 and 250 A’a long</a:t>
-            </a:r>
-          </a:p>
-          <a:p>
-            <a:r>
-              <a:rPr lang="en-US" dirty="0"/>
-              <a:t>Poly-A tail allows the mature messenger RNA molecule to be exported from the nucleus and translated into a protein by ribosomes in the cytoplasm</a:t>
-            </a:r>
-          </a:p>
-        </p:txBody>
-      </p:sp>
-    </p:spTree>
-    <p:extLst>
-      <p:ext uri="{BB962C8B-B14F-4D97-AF65-F5344CB8AC3E}">
-        <p14:creationId xmlns:p14="http://schemas.microsoft.com/office/powerpoint/2010/main" val="1529027372"/>
-      </p:ext>
-    </p:extLst>
-  </p:cSld>
-  <p:clrMapOvr>
-    <a:masterClrMapping/>
-  </p:clrMapOvr>
-</p:sld>
-</file>
-
 <file path=ppt/slides/slide4.xml><?xml version="1.0" encoding="utf-8"?>
 <p:sld xmlns:a="http://schemas.openxmlformats.org/drawingml/2006/main" xmlns:r="http://schemas.openxmlformats.org/officeDocument/2006/relationships" xmlns:p="http://schemas.openxmlformats.org/presentationml/2006/main">
   <p:cSld>
@@ -17016,7 +17111,7 @@
           <p:cNvPr id="2" name="Title 1">
             <a:extLst>
               <a:ext uri="{FF2B5EF4-FFF2-40B4-BE49-F238E27FC236}">
-                <a16:creationId xmlns:a16="http://schemas.microsoft.com/office/drawing/2014/main" id="{80A9B1D4-055D-57FF-35F8-0EA592F3F1F8}"/>
+                <a16:creationId xmlns:a16="http://schemas.microsoft.com/office/drawing/2014/main" id="{EB450FA3-F17D-8199-C237-6A2CF51777EA}"/>
               </a:ext>
             </a:extLst>
           </p:cNvPr>
@@ -17036,7 +17131,7 @@
           <a:p>
             <a:r>
               <a:rPr lang="en-US" dirty="0"/>
-              <a:t>How transcripts are obtained</a:t>
+              <a:t>Poly-A tail</a:t>
             </a:r>
           </a:p>
         </p:txBody>
@@ -17046,7 +17141,7 @@
           <p:cNvPr id="3" name="Content Placeholder 2">
             <a:extLst>
               <a:ext uri="{FF2B5EF4-FFF2-40B4-BE49-F238E27FC236}">
-                <a16:creationId xmlns:a16="http://schemas.microsoft.com/office/drawing/2014/main" id="{9B2E4D15-E297-1A1E-B9ED-FD9A0E742E9B}"/>
+                <a16:creationId xmlns:a16="http://schemas.microsoft.com/office/drawing/2014/main" id="{1346F293-779C-02FF-E46E-9CF199A76A37}"/>
               </a:ext>
             </a:extLst>
           </p:cNvPr>
@@ -17059,108 +17154,29 @@
         </p:nvSpPr>
         <p:spPr>
           <a:xfrm>
-            <a:off x="838200" y="1825625"/>
-            <a:ext cx="10515600" cy="4667250"/>
+            <a:off x="838200" y="1825624"/>
+            <a:ext cx="10515600" cy="4585933"/>
           </a:xfrm>
         </p:spPr>
         <p:txBody>
-          <a:bodyPr>
-            <a:normAutofit fontScale="85000" lnSpcReduction="20000"/>
-          </a:bodyPr>
-          <a:lstStyle/>
-          <a:p>
-            <a:r>
-              <a:rPr lang="en-US" dirty="0"/>
-              <a:t>Two methods</a:t>
-            </a:r>
-          </a:p>
-          <a:p>
-            <a:pPr lvl="1"/>
-            <a:r>
-              <a:rPr lang="en-US" dirty="0"/>
-              <a:t>Ribosome depletion (</a:t>
-            </a:r>
-            <a:r>
-              <a:rPr lang="en-US" dirty="0" err="1"/>
-              <a:t>ribo</a:t>
-            </a:r>
-            <a:r>
-              <a:rPr lang="en-US" dirty="0"/>
-              <a:t>-zero)</a:t>
-            </a:r>
-          </a:p>
-          <a:p>
-            <a:pPr lvl="1"/>
-            <a:r>
-              <a:rPr lang="en-US" dirty="0"/>
-              <a:t>Poly-A capture</a:t>
-            </a:r>
-          </a:p>
-          <a:p>
-            <a:pPr lvl="1"/>
-            <a:endParaRPr lang="en-US" dirty="0"/>
-          </a:p>
-          <a:p>
-            <a:r>
-              <a:rPr lang="en-US" dirty="0"/>
-              <a:t>Dominant method is Poly-A capture (EST, RNA-Seq, Iso-</a:t>
-            </a:r>
-            <a:r>
-              <a:rPr lang="en-US" dirty="0" err="1"/>
-              <a:t>Seq,ONT</a:t>
-            </a:r>
-            <a:r>
-              <a:rPr lang="en-US" dirty="0"/>
-              <a:t> sequencing)</a:t>
-            </a:r>
-          </a:p>
-          <a:p>
-            <a:pPr lvl="1"/>
-            <a:r>
-              <a:rPr lang="en-US" dirty="0"/>
-              <a:t>Reads mature transcripts with introns spliced out</a:t>
-            </a:r>
-          </a:p>
-          <a:p>
-            <a:pPr lvl="1"/>
-            <a:r>
-              <a:rPr lang="en-US" dirty="0"/>
-              <a:t>Requires fresh good quality RNA</a:t>
-            </a:r>
-          </a:p>
-          <a:p>
-            <a:pPr lvl="1"/>
-            <a:r>
-              <a:rPr lang="en-US" dirty="0"/>
-              <a:t>Good for transcriptome assembly</a:t>
-            </a:r>
-          </a:p>
-          <a:p>
-            <a:pPr lvl="1"/>
-            <a:endParaRPr lang="en-US" dirty="0"/>
-          </a:p>
-          <a:p>
-            <a:r>
-              <a:rPr lang="en-US" dirty="0" err="1"/>
-              <a:t>Ribo</a:t>
-            </a:r>
-            <a:r>
-              <a:rPr lang="en-US" dirty="0"/>
-              <a:t>-zero can be used for degraded RNA</a:t>
-            </a:r>
-          </a:p>
-          <a:p>
-            <a:pPr lvl="1"/>
-            <a:r>
-              <a:rPr lang="en-US" dirty="0"/>
-              <a:t>OK for quantification</a:t>
-            </a:r>
-          </a:p>
-          <a:p>
-            <a:pPr lvl="1"/>
-            <a:r>
-              <a:rPr lang="en-US" dirty="0"/>
-              <a:t>Bad for transcriptome assembly</a:t>
+          <a:bodyPr/>
+          <a:lstStyle/>
+          <a:p>
+            <a:r>
+              <a:rPr lang="en-US" dirty="0"/>
+              <a:t>The poly-A tail is a long chain of Adenine nucleotides that is added to a messenger RNA (mRNA) molecule during RNA processing to increase the stability of the molecule</a:t>
+            </a:r>
+          </a:p>
+          <a:p>
+            <a:r>
+              <a:rPr lang="en-US" dirty="0"/>
+              <a:t>Processing of the 3' end adds a poly-A tail to the RNA molecule that is between 100 and 250 A’a long</a:t>
+            </a:r>
+          </a:p>
+          <a:p>
+            <a:r>
+              <a:rPr lang="en-US" dirty="0"/>
+              <a:t>Poly-A tail allows the mature messenger RNA molecule to be exported from the nucleus and translated into a protein by ribosomes in the cytoplasm</a:t>
             </a:r>
           </a:p>
         </p:txBody>
@@ -17168,7 +17184,7 @@
     </p:spTree>
     <p:extLst>
       <p:ext uri="{BB962C8B-B14F-4D97-AF65-F5344CB8AC3E}">
-        <p14:creationId xmlns:p14="http://schemas.microsoft.com/office/powerpoint/2010/main" val="208986471"/>
+        <p14:creationId xmlns:p14="http://schemas.microsoft.com/office/powerpoint/2010/main" val="1529027372"/>
       </p:ext>
     </p:extLst>
   </p:cSld>
@@ -17195,6 +17211,190 @@
           <a:chExt cx="0" cy="0"/>
         </a:xfrm>
       </p:grpSpPr>
+      <p:sp>
+        <p:nvSpPr>
+          <p:cNvPr id="2" name="Title 1">
+            <a:extLst>
+              <a:ext uri="{FF2B5EF4-FFF2-40B4-BE49-F238E27FC236}">
+                <a16:creationId xmlns:a16="http://schemas.microsoft.com/office/drawing/2014/main" id="{80A9B1D4-055D-57FF-35F8-0EA592F3F1F8}"/>
+              </a:ext>
+            </a:extLst>
+          </p:cNvPr>
+          <p:cNvSpPr>
+            <a:spLocks noGrp="1"/>
+          </p:cNvSpPr>
+          <p:nvPr>
+            <p:ph type="title"/>
+          </p:nvPr>
+        </p:nvSpPr>
+        <p:spPr/>
+        <p:txBody>
+          <a:bodyPr>
+            <a:normAutofit fontScale="90000"/>
+          </a:bodyPr>
+          <a:lstStyle/>
+          <a:p>
+            <a:r>
+              <a:rPr lang="en-US" dirty="0"/>
+              <a:t>How transcripts are obtained</a:t>
+            </a:r>
+          </a:p>
+        </p:txBody>
+      </p:sp>
+      <p:sp>
+        <p:nvSpPr>
+          <p:cNvPr id="3" name="Content Placeholder 2">
+            <a:extLst>
+              <a:ext uri="{FF2B5EF4-FFF2-40B4-BE49-F238E27FC236}">
+                <a16:creationId xmlns:a16="http://schemas.microsoft.com/office/drawing/2014/main" id="{9B2E4D15-E297-1A1E-B9ED-FD9A0E742E9B}"/>
+              </a:ext>
+            </a:extLst>
+          </p:cNvPr>
+          <p:cNvSpPr>
+            <a:spLocks noGrp="1"/>
+          </p:cNvSpPr>
+          <p:nvPr>
+            <p:ph idx="1"/>
+          </p:nvPr>
+        </p:nvSpPr>
+        <p:spPr>
+          <a:xfrm>
+            <a:off x="838200" y="1825625"/>
+            <a:ext cx="10515600" cy="4667250"/>
+          </a:xfrm>
+        </p:spPr>
+        <p:txBody>
+          <a:bodyPr>
+            <a:normAutofit fontScale="85000" lnSpcReduction="20000"/>
+          </a:bodyPr>
+          <a:lstStyle/>
+          <a:p>
+            <a:r>
+              <a:rPr lang="en-US" dirty="0"/>
+              <a:t>Two methods</a:t>
+            </a:r>
+          </a:p>
+          <a:p>
+            <a:pPr lvl="1"/>
+            <a:r>
+              <a:rPr lang="en-US" dirty="0"/>
+              <a:t>Ribosome depletion (</a:t>
+            </a:r>
+            <a:r>
+              <a:rPr lang="en-US" dirty="0" err="1"/>
+              <a:t>ribo</a:t>
+            </a:r>
+            <a:r>
+              <a:rPr lang="en-US" dirty="0"/>
+              <a:t>-zero)</a:t>
+            </a:r>
+          </a:p>
+          <a:p>
+            <a:pPr lvl="1"/>
+            <a:r>
+              <a:rPr lang="en-US" dirty="0"/>
+              <a:t>Poly-A capture</a:t>
+            </a:r>
+          </a:p>
+          <a:p>
+            <a:pPr lvl="1"/>
+            <a:endParaRPr lang="en-US" dirty="0"/>
+          </a:p>
+          <a:p>
+            <a:r>
+              <a:rPr lang="en-US" dirty="0"/>
+              <a:t>Dominant method is Poly-A capture (EST, RNA-Seq, Iso-</a:t>
+            </a:r>
+            <a:r>
+              <a:rPr lang="en-US" dirty="0" err="1"/>
+              <a:t>Seq,ONT</a:t>
+            </a:r>
+            <a:r>
+              <a:rPr lang="en-US" dirty="0"/>
+              <a:t> sequencing)</a:t>
+            </a:r>
+          </a:p>
+          <a:p>
+            <a:pPr lvl="1"/>
+            <a:r>
+              <a:rPr lang="en-US" dirty="0"/>
+              <a:t>Reads mature transcripts with introns spliced out</a:t>
+            </a:r>
+          </a:p>
+          <a:p>
+            <a:pPr lvl="1"/>
+            <a:r>
+              <a:rPr lang="en-US" dirty="0"/>
+              <a:t>Requires fresh good quality RNA</a:t>
+            </a:r>
+          </a:p>
+          <a:p>
+            <a:pPr lvl="1"/>
+            <a:r>
+              <a:rPr lang="en-US" dirty="0"/>
+              <a:t>Good for transcriptome assembly</a:t>
+            </a:r>
+          </a:p>
+          <a:p>
+            <a:pPr lvl="1"/>
+            <a:endParaRPr lang="en-US" dirty="0"/>
+          </a:p>
+          <a:p>
+            <a:r>
+              <a:rPr lang="en-US" dirty="0" err="1"/>
+              <a:t>Ribo</a:t>
+            </a:r>
+            <a:r>
+              <a:rPr lang="en-US" dirty="0"/>
+              <a:t>-zero can be used for degraded RNA</a:t>
+            </a:r>
+          </a:p>
+          <a:p>
+            <a:pPr lvl="1"/>
+            <a:r>
+              <a:rPr lang="en-US" dirty="0"/>
+              <a:t>OK for quantification</a:t>
+            </a:r>
+          </a:p>
+          <a:p>
+            <a:pPr lvl="1"/>
+            <a:r>
+              <a:rPr lang="en-US" dirty="0"/>
+              <a:t>Bad for transcriptome assembly</a:t>
+            </a:r>
+          </a:p>
+        </p:txBody>
+      </p:sp>
+    </p:spTree>
+    <p:extLst>
+      <p:ext uri="{BB962C8B-B14F-4D97-AF65-F5344CB8AC3E}">
+        <p14:creationId xmlns:p14="http://schemas.microsoft.com/office/powerpoint/2010/main" val="208986471"/>
+      </p:ext>
+    </p:extLst>
+  </p:cSld>
+  <p:clrMapOvr>
+    <a:masterClrMapping/>
+  </p:clrMapOvr>
+</p:sld>
+</file>
+
+<file path=ppt/slides/slide42.xml><?xml version="1.0" encoding="utf-8"?>
+<p:sld xmlns:a="http://schemas.openxmlformats.org/drawingml/2006/main" xmlns:r="http://schemas.openxmlformats.org/officeDocument/2006/relationships" xmlns:p="http://schemas.openxmlformats.org/presentationml/2006/main">
+  <p:cSld>
+    <p:spTree>
+      <p:nvGrpSpPr>
+        <p:cNvPr id="1" name=""/>
+        <p:cNvGrpSpPr/>
+        <p:nvPr/>
+      </p:nvGrpSpPr>
+      <p:grpSpPr>
+        <a:xfrm>
+          <a:off x="0" y="0"/>
+          <a:ext cx="0" cy="0"/>
+          <a:chOff x="0" y="0"/>
+          <a:chExt cx="0" cy="0"/>
+        </a:xfrm>
+      </p:grpSpPr>
       <p:pic>
         <p:nvPicPr>
           <p:cNvPr id="6" name="Picture 5" descr="Diagram&#10;&#10;Description automatically generated">
@@ -17248,7 +17448,7 @@
           <a:p>
             <a:fld id="{B731AFB5-CD11-684F-BCC6-06E220628C5A}" type="slidenum">
               <a:rPr lang="en-US" smtClean="0"/>
-              <a:t>41</a:t>
+              <a:t>42</a:t>
             </a:fld>
             <a:endParaRPr lang="en-US"/>
           </a:p>
@@ -17376,7 +17576,7 @@
 </p:sld>
 </file>
 
-<file path=ppt/slides/slide42.xml><?xml version="1.0" encoding="utf-8"?>
+<file path=ppt/slides/slide43.xml><?xml version="1.0" encoding="utf-8"?>
 <p:sld xmlns:a="http://schemas.openxmlformats.org/drawingml/2006/main" xmlns:r="http://schemas.openxmlformats.org/officeDocument/2006/relationships" xmlns:p="http://schemas.openxmlformats.org/presentationml/2006/main">
   <p:cSld>
     <p:spTree>
@@ -17616,7 +17816,7 @@
             <a:fld id="{B82CCC60-E8CD-4174-8B1A-7DF615B22EEF}" type="slidenum">
               <a:rPr lang="en-US" smtClean="0"/>
               <a:pPr/>
-              <a:t>42</a:t>
+              <a:t>43</a:t>
             </a:fld>
             <a:endParaRPr lang="en-US"/>
           </a:p>
@@ -18613,7 +18813,7 @@
 </p:sld>
 </file>
 
-<file path=ppt/slides/slide43.xml><?xml version="1.0" encoding="utf-8"?>
+<file path=ppt/slides/slide44.xml><?xml version="1.0" encoding="utf-8"?>
 <p:sld xmlns:a="http://schemas.openxmlformats.org/drawingml/2006/main" xmlns:r="http://schemas.openxmlformats.org/officeDocument/2006/relationships" xmlns:p="http://schemas.openxmlformats.org/presentationml/2006/main">
   <p:cSld>
     <p:spTree>
@@ -18733,7 +18933,7 @@
             <a:fld id="{B82CCC60-E8CD-4174-8B1A-7DF615B22EEF}" type="slidenum">
               <a:rPr lang="en-US" smtClean="0"/>
               <a:pPr/>
-              <a:t>43</a:t>
+              <a:t>44</a:t>
             </a:fld>
             <a:endParaRPr lang="en-US"/>
           </a:p>
@@ -19600,7 +19800,7 @@
 </p:sld>
 </file>
 
-<file path=ppt/slides/slide44.xml><?xml version="1.0" encoding="utf-8"?>
+<file path=ppt/slides/slide45.xml><?xml version="1.0" encoding="utf-8"?>
 <p:sld xmlns:a="http://schemas.openxmlformats.org/drawingml/2006/main" xmlns:r="http://schemas.openxmlformats.org/officeDocument/2006/relationships" xmlns:p="http://schemas.openxmlformats.org/presentationml/2006/main">
   <p:cSld>
     <p:spTree>
@@ -19636,7 +19836,7 @@
           </a:ln>
           <a:extLst>
             <a:ext uri="{C572A759-6A51-4108-AA02-DFA0A04FC94B}">
-              <ma14:wrappingTextBoxFlag xmlns="" xmlns:m="http://schemas.openxmlformats.org/officeDocument/2006/math" xmlns:a14="http://schemas.microsoft.com/office/drawing/2010/main" xmlns:ma14="http://schemas.microsoft.com/office/mac/drawingml/2011/main" val="1"/>
+              <ma14:wrappingTextBoxFlag xmlns:ma14="http://schemas.microsoft.com/office/mac/drawingml/2011/main" xmlns:a14="http://schemas.microsoft.com/office/drawing/2010/main" xmlns:m="http://schemas.openxmlformats.org/officeDocument/2006/math" xmlns="" val="1"/>
             </a:ext>
           </a:extLst>
         </p:spPr>
@@ -20478,7 +20678,7 @@
 </p:sld>
 </file>
 
-<file path=ppt/slides/slide45.xml><?xml version="1.0" encoding="utf-8"?>
+<file path=ppt/slides/slide46.xml><?xml version="1.0" encoding="utf-8"?>
 <p:sld xmlns:a="http://schemas.openxmlformats.org/drawingml/2006/main" xmlns:r="http://schemas.openxmlformats.org/officeDocument/2006/relationships" xmlns:p="http://schemas.openxmlformats.org/presentationml/2006/main">
   <p:cSld>
     <p:spTree>
@@ -21656,124 +21856,6 @@
 </p:sld>
 </file>
 
-<file path=ppt/slides/slide46.xml><?xml version="1.0" encoding="utf-8"?>
-<p:sld xmlns:a="http://schemas.openxmlformats.org/drawingml/2006/main" xmlns:r="http://schemas.openxmlformats.org/officeDocument/2006/relationships" xmlns:p="http://schemas.openxmlformats.org/presentationml/2006/main">
-  <p:cSld>
-    <p:spTree>
-      <p:nvGrpSpPr>
-        <p:cNvPr id="1" name=""/>
-        <p:cNvGrpSpPr/>
-        <p:nvPr/>
-      </p:nvGrpSpPr>
-      <p:grpSpPr>
-        <a:xfrm>
-          <a:off x="0" y="0"/>
-          <a:ext cx="0" cy="0"/>
-          <a:chOff x="0" y="0"/>
-          <a:chExt cx="0" cy="0"/>
-        </a:xfrm>
-      </p:grpSpPr>
-      <p:sp>
-        <p:nvSpPr>
-          <p:cNvPr id="2" name="Title 1">
-            <a:extLst>
-              <a:ext uri="{FF2B5EF4-FFF2-40B4-BE49-F238E27FC236}">
-                <a16:creationId xmlns:a16="http://schemas.microsoft.com/office/drawing/2014/main" id="{7876AE29-4A2D-B3A0-D4EA-CE07B6AE93F1}"/>
-              </a:ext>
-            </a:extLst>
-          </p:cNvPr>
-          <p:cNvSpPr>
-            <a:spLocks noGrp="1"/>
-          </p:cNvSpPr>
-          <p:nvPr>
-            <p:ph type="title"/>
-          </p:nvPr>
-        </p:nvSpPr>
-        <p:spPr/>
-        <p:txBody>
-          <a:bodyPr>
-            <a:normAutofit fontScale="90000"/>
-          </a:bodyPr>
-          <a:lstStyle/>
-          <a:p>
-            <a:r>
-              <a:rPr lang="en-US" dirty="0"/>
-              <a:t>Spliced alignment</a:t>
-            </a:r>
-          </a:p>
-        </p:txBody>
-      </p:sp>
-      <p:sp>
-        <p:nvSpPr>
-          <p:cNvPr id="3" name="Content Placeholder 2">
-            <a:extLst>
-              <a:ext uri="{FF2B5EF4-FFF2-40B4-BE49-F238E27FC236}">
-                <a16:creationId xmlns:a16="http://schemas.microsoft.com/office/drawing/2014/main" id="{80EAD1E1-6FBD-1E46-1494-5F1DF6B2D433}"/>
-              </a:ext>
-            </a:extLst>
-          </p:cNvPr>
-          <p:cNvSpPr>
-            <a:spLocks noGrp="1"/>
-          </p:cNvSpPr>
-          <p:nvPr>
-            <p:ph idx="1"/>
-          </p:nvPr>
-        </p:nvSpPr>
-        <p:spPr/>
-        <p:txBody>
-          <a:bodyPr/>
-          <a:lstStyle/>
-          <a:p>
-            <a:r>
-              <a:rPr lang="en-US" dirty="0"/>
-              <a:t>We find transcripts on the genome by spliced alignment of transcriptome reads</a:t>
-            </a:r>
-          </a:p>
-        </p:txBody>
-      </p:sp>
-      <p:sp>
-        <p:nvSpPr>
-          <p:cNvPr id="4" name="Slide Number Placeholder 3">
-            <a:extLst>
-              <a:ext uri="{FF2B5EF4-FFF2-40B4-BE49-F238E27FC236}">
-                <a16:creationId xmlns:a16="http://schemas.microsoft.com/office/drawing/2014/main" id="{DD47867D-EB0C-6360-7F8B-53D714A0AF6E}"/>
-              </a:ext>
-            </a:extLst>
-          </p:cNvPr>
-          <p:cNvSpPr>
-            <a:spLocks noGrp="1"/>
-          </p:cNvSpPr>
-          <p:nvPr>
-            <p:ph type="sldNum" sz="quarter" idx="12"/>
-          </p:nvPr>
-        </p:nvSpPr>
-        <p:spPr/>
-        <p:txBody>
-          <a:bodyPr/>
-          <a:lstStyle/>
-          <a:p>
-            <a:fld id="{B82CCC60-E8CD-4174-8B1A-7DF615B22EEF}" type="slidenum">
-              <a:rPr lang="en-US" smtClean="0"/>
-              <a:pPr/>
-              <a:t>46</a:t>
-            </a:fld>
-            <a:endParaRPr lang="en-US"/>
-          </a:p>
-        </p:txBody>
-      </p:sp>
-    </p:spTree>
-    <p:extLst>
-      <p:ext uri="{BB962C8B-B14F-4D97-AF65-F5344CB8AC3E}">
-        <p14:creationId xmlns:p14="http://schemas.microsoft.com/office/powerpoint/2010/main" val="2724807813"/>
-      </p:ext>
-    </p:extLst>
-  </p:cSld>
-  <p:clrMapOvr>
-    <a:masterClrMapping/>
-  </p:clrMapOvr>
-</p:sld>
-</file>
-
 <file path=ppt/slides/slide47.xml><?xml version="1.0" encoding="utf-8"?>
 <p:sld xmlns:a="http://schemas.openxmlformats.org/drawingml/2006/main" xmlns:r="http://schemas.openxmlformats.org/officeDocument/2006/relationships" xmlns:p="http://schemas.openxmlformats.org/presentationml/2006/main">
   <p:cSld>
@@ -21796,7 +21878,7 @@
           <p:cNvPr id="2" name="Title 1">
             <a:extLst>
               <a:ext uri="{FF2B5EF4-FFF2-40B4-BE49-F238E27FC236}">
-                <a16:creationId xmlns:a16="http://schemas.microsoft.com/office/drawing/2014/main" id="{63591BA9-51AC-D3CF-5415-3A7693BA9A77}"/>
+                <a16:creationId xmlns:a16="http://schemas.microsoft.com/office/drawing/2014/main" id="{7876AE29-4A2D-B3A0-D4EA-CE07B6AE93F1}"/>
               </a:ext>
             </a:extLst>
           </p:cNvPr>
@@ -21816,7 +21898,7 @@
           <a:p>
             <a:r>
               <a:rPr lang="en-US" dirty="0"/>
-              <a:t>Variant Calling</a:t>
+              <a:t>Spliced alignment</a:t>
             </a:r>
           </a:p>
         </p:txBody>
@@ -21826,7 +21908,7 @@
           <p:cNvPr id="3" name="Content Placeholder 2">
             <a:extLst>
               <a:ext uri="{FF2B5EF4-FFF2-40B4-BE49-F238E27FC236}">
-                <a16:creationId xmlns:a16="http://schemas.microsoft.com/office/drawing/2014/main" id="{6424252B-75A5-A091-0B21-1EB810DA9B0E}"/>
+                <a16:creationId xmlns:a16="http://schemas.microsoft.com/office/drawing/2014/main" id="{80EAD1E1-6FBD-1E46-1494-5F1DF6B2D433}"/>
               </a:ext>
             </a:extLst>
           </p:cNvPr>
@@ -21839,48 +21921,12 @@
         </p:nvSpPr>
         <p:spPr/>
         <p:txBody>
-          <a:bodyPr>
-            <a:normAutofit lnSpcReduction="10000"/>
-          </a:bodyPr>
-          <a:lstStyle/>
-          <a:p>
-            <a:r>
-              <a:rPr lang="en-US" b="1" dirty="0"/>
-              <a:t>Sequencing: </a:t>
-            </a:r>
-            <a:r>
-              <a:rPr lang="en-US" dirty="0"/>
-              <a:t>A DNA sample is sequenced to generate a large number of short reads containing genetic information. </a:t>
-            </a:r>
-          </a:p>
-          <a:p>
-            <a:r>
-              <a:rPr lang="en-US" b="1" dirty="0"/>
-              <a:t>Alignment:</a:t>
-            </a:r>
-            <a:r>
-              <a:rPr lang="en-US" dirty="0"/>
-              <a:t> The generated short reads are aligned (mapped) to a known reference genome. </a:t>
-            </a:r>
-          </a:p>
-          <a:p>
-            <a:r>
-              <a:rPr lang="en-US" b="1" dirty="0"/>
-              <a:t>Variant Identification: </a:t>
-            </a:r>
-            <a:r>
-              <a:rPr lang="en-US" dirty="0"/>
-              <a:t>Bioinformatic algorithms compare the aligned reads to the reference to identify positions where they differ, indicating a variant. </a:t>
-            </a:r>
-          </a:p>
-          <a:p>
-            <a:r>
-              <a:rPr lang="en-US" b="1" dirty="0"/>
-              <a:t>Variant Call Formatting: </a:t>
-            </a:r>
-            <a:r>
-              <a:rPr lang="en-US" dirty="0"/>
-              <a:t>The identified variants are compiled into a standardized Variant Call Format (VCF) file. </a:t>
+          <a:bodyPr/>
+          <a:lstStyle/>
+          <a:p>
+            <a:r>
+              <a:rPr lang="en-US" dirty="0"/>
+              <a:t>We find transcripts on the genome by spliced alignment of transcriptome reads</a:t>
             </a:r>
           </a:p>
         </p:txBody>
@@ -21890,7 +21936,7 @@
           <p:cNvPr id="4" name="Slide Number Placeholder 3">
             <a:extLst>
               <a:ext uri="{FF2B5EF4-FFF2-40B4-BE49-F238E27FC236}">
-                <a16:creationId xmlns:a16="http://schemas.microsoft.com/office/drawing/2014/main" id="{58A8F257-5324-DBC6-ACAF-B703C251F65F}"/>
+                <a16:creationId xmlns:a16="http://schemas.microsoft.com/office/drawing/2014/main" id="{DD47867D-EB0C-6360-7F8B-53D714A0AF6E}"/>
               </a:ext>
             </a:extLst>
           </p:cNvPr>
@@ -21918,7 +21964,7 @@
     </p:spTree>
     <p:extLst>
       <p:ext uri="{BB962C8B-B14F-4D97-AF65-F5344CB8AC3E}">
-        <p14:creationId xmlns:p14="http://schemas.microsoft.com/office/powerpoint/2010/main" val="582660925"/>
+        <p14:creationId xmlns:p14="http://schemas.microsoft.com/office/powerpoint/2010/main" val="2724807813"/>
       </p:ext>
     </p:extLst>
   </p:cSld>
@@ -21950,7 +21996,7 @@
           <p:cNvPr id="2" name="Title 1">
             <a:extLst>
               <a:ext uri="{FF2B5EF4-FFF2-40B4-BE49-F238E27FC236}">
-                <a16:creationId xmlns:a16="http://schemas.microsoft.com/office/drawing/2014/main" id="{F21B672D-A435-BC83-72AA-E32D227F60BD}"/>
+                <a16:creationId xmlns:a16="http://schemas.microsoft.com/office/drawing/2014/main" id="{63591BA9-51AC-D3CF-5415-3A7693BA9A77}"/>
               </a:ext>
             </a:extLst>
           </p:cNvPr>
@@ -21970,7 +22016,7 @@
           <a:p>
             <a:r>
               <a:rPr lang="en-US" dirty="0"/>
-              <a:t>Types of variants</a:t>
+              <a:t>Variant Calling</a:t>
             </a:r>
           </a:p>
         </p:txBody>
@@ -21980,7 +22026,7 @@
           <p:cNvPr id="3" name="Content Placeholder 2">
             <a:extLst>
               <a:ext uri="{FF2B5EF4-FFF2-40B4-BE49-F238E27FC236}">
-                <a16:creationId xmlns:a16="http://schemas.microsoft.com/office/drawing/2014/main" id="{2B1184CE-5E86-958A-1224-B2F8288EB7E6}"/>
+                <a16:creationId xmlns:a16="http://schemas.microsoft.com/office/drawing/2014/main" id="{6424252B-75A5-A091-0B21-1EB810DA9B0E}"/>
               </a:ext>
             </a:extLst>
           </p:cNvPr>
@@ -21993,36 +22039,48 @@
         </p:nvSpPr>
         <p:spPr/>
         <p:txBody>
-          <a:bodyPr/>
+          <a:bodyPr>
+            <a:normAutofit lnSpcReduction="10000"/>
+          </a:bodyPr>
           <a:lstStyle/>
           <a:p>
             <a:r>
               <a:rPr lang="en-US" b="1" dirty="0"/>
-              <a:t>Single Nucleotide Variants (SNVs): </a:t>
-            </a:r>
-            <a:r>
-              <a:rPr lang="en-US" dirty="0"/>
-              <a:t>A change in a single DNA base pair, such as a single nucleotide polymorphism (SNP).</a:t>
+              <a:t>Sequencing: </a:t>
+            </a:r>
+            <a:r>
+              <a:rPr lang="en-US" dirty="0"/>
+              <a:t>A DNA sample is sequenced to generate a large number of short reads containing genetic information. </a:t>
             </a:r>
           </a:p>
           <a:p>
             <a:r>
               <a:rPr lang="en-US" b="1" dirty="0"/>
-              <a:t>Insertions/Deletions (Indels):</a:t>
-            </a:r>
-            <a:r>
-              <a:rPr lang="en-US" dirty="0"/>
-              <a:t> Short segments of DNA that are inserted or deleted.</a:t>
+              <a:t>Alignment:</a:t>
+            </a:r>
+            <a:r>
+              <a:rPr lang="en-US" dirty="0"/>
+              <a:t> The generated short reads are aligned (mapped) to a known reference genome. </a:t>
             </a:r>
           </a:p>
           <a:p>
             <a:r>
               <a:rPr lang="en-US" b="1" dirty="0"/>
-              <a:t>Structural Variants (SVs): </a:t>
-            </a:r>
-            <a:r>
-              <a:rPr lang="en-US" dirty="0"/>
-              <a:t>Larger-scale changes to the genome, including deletions, duplications, inversions, and translocations.</a:t>
+              <a:t>Variant Identification: </a:t>
+            </a:r>
+            <a:r>
+              <a:rPr lang="en-US" dirty="0"/>
+              <a:t>Bioinformatic algorithms compare the aligned reads to the reference to identify positions where they differ, indicating a variant. </a:t>
+            </a:r>
+          </a:p>
+          <a:p>
+            <a:r>
+              <a:rPr lang="en-US" b="1" dirty="0"/>
+              <a:t>Variant Call Formatting: </a:t>
+            </a:r>
+            <a:r>
+              <a:rPr lang="en-US" dirty="0"/>
+              <a:t>The identified variants are compiled into a standardized Variant Call Format (VCF) file. </a:t>
             </a:r>
           </a:p>
         </p:txBody>
@@ -22032,7 +22090,7 @@
           <p:cNvPr id="4" name="Slide Number Placeholder 3">
             <a:extLst>
               <a:ext uri="{FF2B5EF4-FFF2-40B4-BE49-F238E27FC236}">
-                <a16:creationId xmlns:a16="http://schemas.microsoft.com/office/drawing/2014/main" id="{7680CDBB-CABE-DADA-9F90-7C41BDB5D374}"/>
+                <a16:creationId xmlns:a16="http://schemas.microsoft.com/office/drawing/2014/main" id="{58A8F257-5324-DBC6-ACAF-B703C251F65F}"/>
               </a:ext>
             </a:extLst>
           </p:cNvPr>
@@ -22060,7 +22118,7 @@
     </p:spTree>
     <p:extLst>
       <p:ext uri="{BB962C8B-B14F-4D97-AF65-F5344CB8AC3E}">
-        <p14:creationId xmlns:p14="http://schemas.microsoft.com/office/powerpoint/2010/main" val="897960614"/>
+        <p14:creationId xmlns:p14="http://schemas.microsoft.com/office/powerpoint/2010/main" val="582660925"/>
       </p:ext>
     </p:extLst>
   </p:cSld>
@@ -22092,7 +22150,7 @@
           <p:cNvPr id="2" name="Title 1">
             <a:extLst>
               <a:ext uri="{FF2B5EF4-FFF2-40B4-BE49-F238E27FC236}">
-                <a16:creationId xmlns:a16="http://schemas.microsoft.com/office/drawing/2014/main" id="{41DDEB4F-9DB9-B8C4-DCFA-CBAE516F9E21}"/>
+                <a16:creationId xmlns:a16="http://schemas.microsoft.com/office/drawing/2014/main" id="{F21B672D-A435-BC83-72AA-E32D227F60BD}"/>
               </a:ext>
             </a:extLst>
           </p:cNvPr>
@@ -22112,7 +22170,7 @@
           <a:p>
             <a:r>
               <a:rPr lang="en-US" dirty="0"/>
-              <a:t>Why variant calling is important</a:t>
+              <a:t>Types of variants</a:t>
             </a:r>
           </a:p>
         </p:txBody>
@@ -22122,7 +22180,7 @@
           <p:cNvPr id="3" name="Content Placeholder 2">
             <a:extLst>
               <a:ext uri="{FF2B5EF4-FFF2-40B4-BE49-F238E27FC236}">
-                <a16:creationId xmlns:a16="http://schemas.microsoft.com/office/drawing/2014/main" id="{AC86A152-31BF-4E55-AF0D-73795B258635}"/>
+                <a16:creationId xmlns:a16="http://schemas.microsoft.com/office/drawing/2014/main" id="{2B1184CE-5E86-958A-1224-B2F8288EB7E6}"/>
               </a:ext>
             </a:extLst>
           </p:cNvPr>
@@ -22140,31 +22198,31 @@
           <a:p>
             <a:r>
               <a:rPr lang="en-US" b="1" dirty="0"/>
-              <a:t>Disease Research: </a:t>
-            </a:r>
-            <a:r>
-              <a:rPr lang="en-US" dirty="0"/>
-              <a:t>Variant calling helps identify genetic mutations associated with various diseases, including cancer. </a:t>
+              <a:t>Single Nucleotide Variants (SNVs): </a:t>
+            </a:r>
+            <a:r>
+              <a:rPr lang="en-US" dirty="0"/>
+              <a:t>A change in a single DNA base pair, such as a single nucleotide polymorphism (SNP).</a:t>
             </a:r>
           </a:p>
           <a:p>
             <a:r>
               <a:rPr lang="en-US" b="1" dirty="0"/>
-              <a:t>Clinical Diagnostics: </a:t>
-            </a:r>
-            <a:r>
-              <a:rPr lang="en-US" dirty="0"/>
-              <a:t>It provides data for diagnosing genetic conditions and understanding individual predispositions to common health problems. </a:t>
+              <a:t>Insertions/Deletions (Indels):</a:t>
+            </a:r>
+            <a:r>
+              <a:rPr lang="en-US" dirty="0"/>
+              <a:t> Short segments of DNA that are inserted or deleted.</a:t>
             </a:r>
           </a:p>
           <a:p>
             <a:r>
               <a:rPr lang="en-US" b="1" dirty="0"/>
-              <a:t>Evolutionary Studies: </a:t>
-            </a:r>
-            <a:r>
-              <a:rPr lang="en-US" dirty="0"/>
-              <a:t>Comparing variants across populations helps researchers understand evolutionary relationships and genetic diversity. </a:t>
+              <a:t>Structural Variants (SVs): </a:t>
+            </a:r>
+            <a:r>
+              <a:rPr lang="en-US" dirty="0"/>
+              <a:t>Larger-scale changes to the genome, including deletions, duplications, inversions, and translocations.</a:t>
             </a:r>
           </a:p>
         </p:txBody>
@@ -22174,7 +22232,7 @@
           <p:cNvPr id="4" name="Slide Number Placeholder 3">
             <a:extLst>
               <a:ext uri="{FF2B5EF4-FFF2-40B4-BE49-F238E27FC236}">
-                <a16:creationId xmlns:a16="http://schemas.microsoft.com/office/drawing/2014/main" id="{1C15619B-34FD-33B8-1746-F3746FA338C0}"/>
+                <a16:creationId xmlns:a16="http://schemas.microsoft.com/office/drawing/2014/main" id="{7680CDBB-CABE-DADA-9F90-7C41BDB5D374}"/>
               </a:ext>
             </a:extLst>
           </p:cNvPr>
@@ -22202,7 +22260,7 @@
     </p:spTree>
     <p:extLst>
       <p:ext uri="{BB962C8B-B14F-4D97-AF65-F5344CB8AC3E}">
-        <p14:creationId xmlns:p14="http://schemas.microsoft.com/office/powerpoint/2010/main" val="2016871750"/>
+        <p14:creationId xmlns:p14="http://schemas.microsoft.com/office/powerpoint/2010/main" val="897960614"/>
       </p:ext>
     </p:extLst>
   </p:cSld>
@@ -22639,6 +22697,148 @@
     <p:extLst>
       <p:ext uri="{BB962C8B-B14F-4D97-AF65-F5344CB8AC3E}">
         <p14:creationId xmlns:p14="http://schemas.microsoft.com/office/powerpoint/2010/main" val="1092133853"/>
+      </p:ext>
+    </p:extLst>
+  </p:cSld>
+  <p:clrMapOvr>
+    <a:masterClrMapping/>
+  </p:clrMapOvr>
+</p:sld>
+</file>
+
+<file path=ppt/slides/slide50.xml><?xml version="1.0" encoding="utf-8"?>
+<p:sld xmlns:a="http://schemas.openxmlformats.org/drawingml/2006/main" xmlns:r="http://schemas.openxmlformats.org/officeDocument/2006/relationships" xmlns:p="http://schemas.openxmlformats.org/presentationml/2006/main">
+  <p:cSld>
+    <p:spTree>
+      <p:nvGrpSpPr>
+        <p:cNvPr id="1" name=""/>
+        <p:cNvGrpSpPr/>
+        <p:nvPr/>
+      </p:nvGrpSpPr>
+      <p:grpSpPr>
+        <a:xfrm>
+          <a:off x="0" y="0"/>
+          <a:ext cx="0" cy="0"/>
+          <a:chOff x="0" y="0"/>
+          <a:chExt cx="0" cy="0"/>
+        </a:xfrm>
+      </p:grpSpPr>
+      <p:sp>
+        <p:nvSpPr>
+          <p:cNvPr id="2" name="Title 1">
+            <a:extLst>
+              <a:ext uri="{FF2B5EF4-FFF2-40B4-BE49-F238E27FC236}">
+                <a16:creationId xmlns:a16="http://schemas.microsoft.com/office/drawing/2014/main" id="{41DDEB4F-9DB9-B8C4-DCFA-CBAE516F9E21}"/>
+              </a:ext>
+            </a:extLst>
+          </p:cNvPr>
+          <p:cNvSpPr>
+            <a:spLocks noGrp="1"/>
+          </p:cNvSpPr>
+          <p:nvPr>
+            <p:ph type="title"/>
+          </p:nvPr>
+        </p:nvSpPr>
+        <p:spPr/>
+        <p:txBody>
+          <a:bodyPr>
+            <a:normAutofit fontScale="90000"/>
+          </a:bodyPr>
+          <a:lstStyle/>
+          <a:p>
+            <a:r>
+              <a:rPr lang="en-US" dirty="0"/>
+              <a:t>Why variant calling is important</a:t>
+            </a:r>
+          </a:p>
+        </p:txBody>
+      </p:sp>
+      <p:sp>
+        <p:nvSpPr>
+          <p:cNvPr id="3" name="Content Placeholder 2">
+            <a:extLst>
+              <a:ext uri="{FF2B5EF4-FFF2-40B4-BE49-F238E27FC236}">
+                <a16:creationId xmlns:a16="http://schemas.microsoft.com/office/drawing/2014/main" id="{AC86A152-31BF-4E55-AF0D-73795B258635}"/>
+              </a:ext>
+            </a:extLst>
+          </p:cNvPr>
+          <p:cNvSpPr>
+            <a:spLocks noGrp="1"/>
+          </p:cNvSpPr>
+          <p:nvPr>
+            <p:ph idx="1"/>
+          </p:nvPr>
+        </p:nvSpPr>
+        <p:spPr/>
+        <p:txBody>
+          <a:bodyPr/>
+          <a:lstStyle/>
+          <a:p>
+            <a:r>
+              <a:rPr lang="en-US" b="1" dirty="0"/>
+              <a:t>Disease Research: </a:t>
+            </a:r>
+            <a:r>
+              <a:rPr lang="en-US" dirty="0"/>
+              <a:t>Variant calling helps identify genetic mutations associated with various diseases, including cancer. </a:t>
+            </a:r>
+          </a:p>
+          <a:p>
+            <a:r>
+              <a:rPr lang="en-US" b="1" dirty="0"/>
+              <a:t>Clinical Diagnostics: </a:t>
+            </a:r>
+            <a:r>
+              <a:rPr lang="en-US" dirty="0"/>
+              <a:t>It provides data for diagnosing genetic conditions and understanding individual predispositions to common health problems. </a:t>
+            </a:r>
+          </a:p>
+          <a:p>
+            <a:r>
+              <a:rPr lang="en-US" b="1" dirty="0"/>
+              <a:t>Evolutionary Studies: </a:t>
+            </a:r>
+            <a:r>
+              <a:rPr lang="en-US" dirty="0"/>
+              <a:t>Comparing variants across populations helps researchers understand evolutionary relationships and genetic diversity. </a:t>
+            </a:r>
+          </a:p>
+        </p:txBody>
+      </p:sp>
+      <p:sp>
+        <p:nvSpPr>
+          <p:cNvPr id="4" name="Slide Number Placeholder 3">
+            <a:extLst>
+              <a:ext uri="{FF2B5EF4-FFF2-40B4-BE49-F238E27FC236}">
+                <a16:creationId xmlns:a16="http://schemas.microsoft.com/office/drawing/2014/main" id="{1C15619B-34FD-33B8-1746-F3746FA338C0}"/>
+              </a:ext>
+            </a:extLst>
+          </p:cNvPr>
+          <p:cNvSpPr>
+            <a:spLocks noGrp="1"/>
+          </p:cNvSpPr>
+          <p:nvPr>
+            <p:ph type="sldNum" sz="quarter" idx="12"/>
+          </p:nvPr>
+        </p:nvSpPr>
+        <p:spPr/>
+        <p:txBody>
+          <a:bodyPr/>
+          <a:lstStyle/>
+          <a:p>
+            <a:fld id="{B82CCC60-E8CD-4174-8B1A-7DF615B22EEF}" type="slidenum">
+              <a:rPr lang="en-US" smtClean="0"/>
+              <a:pPr/>
+              <a:t>50</a:t>
+            </a:fld>
+            <a:endParaRPr lang="en-US"/>
+          </a:p>
+        </p:txBody>
+      </p:sp>
+    </p:spTree>
+    <p:extLst>
+      <p:ext uri="{BB962C8B-B14F-4D97-AF65-F5344CB8AC3E}">
+        <p14:creationId xmlns:p14="http://schemas.microsoft.com/office/powerpoint/2010/main" val="2016871750"/>
       </p:ext>
     </p:extLst>
   </p:cSld>
